--- a/RAC/19장/19장_RACOneNode.pptx
+++ b/RAC/19장/19장_RACOneNode.pptx
@@ -4,49 +4,52 @@
   <p:sldMasterIdLst>
     <p:sldMasterId id="2147483648" r:id="rId1"/>
   </p:sldMasterIdLst>
+  <p:notesMasterIdLst>
+    <p:notesMasterId r:id="rId42"/>
+  </p:notesMasterIdLst>
   <p:sldIdLst>
-    <p:sldId id="256" r:id="rId7"/>
-    <p:sldId id="257" r:id="rId8"/>
-    <p:sldId id="258" r:id="rId9"/>
-    <p:sldId id="259" r:id="rId10"/>
-    <p:sldId id="260" r:id="rId12"/>
-    <p:sldId id="261" r:id="rId13"/>
-    <p:sldId id="262" r:id="rId14"/>
-    <p:sldId id="263" r:id="rId15"/>
-    <p:sldId id="264" r:id="rId16"/>
-    <p:sldId id="265" r:id="rId17"/>
-    <p:sldId id="266" r:id="rId18"/>
-    <p:sldId id="267" r:id="rId19"/>
-    <p:sldId id="268" r:id="rId20"/>
-    <p:sldId id="269" r:id="rId21"/>
-    <p:sldId id="270" r:id="rId22"/>
-    <p:sldId id="271" r:id="rId23"/>
-    <p:sldId id="272" r:id="rId24"/>
-    <p:sldId id="273" r:id="rId25"/>
-    <p:sldId id="274" r:id="rId26"/>
-    <p:sldId id="275" r:id="rId27"/>
-    <p:sldId id="276" r:id="rId28"/>
-    <p:sldId id="277" r:id="rId29"/>
-    <p:sldId id="278" r:id="rId30"/>
-    <p:sldId id="279" r:id="rId31"/>
-    <p:sldId id="280" r:id="rId32"/>
-    <p:sldId id="281" r:id="rId33"/>
-    <p:sldId id="282" r:id="rId34"/>
-    <p:sldId id="283" r:id="rId35"/>
-    <p:sldId id="284" r:id="rId36"/>
-    <p:sldId id="285" r:id="rId37"/>
-    <p:sldId id="286" r:id="rId38"/>
-    <p:sldId id="287" r:id="rId39"/>
-    <p:sldId id="288" r:id="rId40"/>
-    <p:sldId id="289" r:id="rId41"/>
-    <p:sldId id="290" r:id="rId42"/>
-    <p:sldId id="291" r:id="rId43"/>
-    <p:sldId id="292" r:id="rId44"/>
-    <p:sldId id="293" r:id="rId45"/>
-    <p:sldId id="294" r:id="rId46"/>
-    <p:sldId id="295" r:id="rId47"/>
+    <p:sldId id="256" r:id="rId2"/>
+    <p:sldId id="257" r:id="rId3"/>
+    <p:sldId id="258" r:id="rId4"/>
+    <p:sldId id="259" r:id="rId5"/>
+    <p:sldId id="260" r:id="rId6"/>
+    <p:sldId id="261" r:id="rId7"/>
+    <p:sldId id="262" r:id="rId8"/>
+    <p:sldId id="263" r:id="rId9"/>
+    <p:sldId id="264" r:id="rId10"/>
+    <p:sldId id="265" r:id="rId11"/>
+    <p:sldId id="266" r:id="rId12"/>
+    <p:sldId id="267" r:id="rId13"/>
+    <p:sldId id="268" r:id="rId14"/>
+    <p:sldId id="269" r:id="rId15"/>
+    <p:sldId id="270" r:id="rId16"/>
+    <p:sldId id="271" r:id="rId17"/>
+    <p:sldId id="272" r:id="rId18"/>
+    <p:sldId id="273" r:id="rId19"/>
+    <p:sldId id="274" r:id="rId20"/>
+    <p:sldId id="275" r:id="rId21"/>
+    <p:sldId id="276" r:id="rId22"/>
+    <p:sldId id="277" r:id="rId23"/>
+    <p:sldId id="278" r:id="rId24"/>
+    <p:sldId id="279" r:id="rId25"/>
+    <p:sldId id="280" r:id="rId26"/>
+    <p:sldId id="281" r:id="rId27"/>
+    <p:sldId id="282" r:id="rId28"/>
+    <p:sldId id="283" r:id="rId29"/>
+    <p:sldId id="284" r:id="rId30"/>
+    <p:sldId id="285" r:id="rId31"/>
+    <p:sldId id="286" r:id="rId32"/>
+    <p:sldId id="287" r:id="rId33"/>
+    <p:sldId id="288" r:id="rId34"/>
+    <p:sldId id="289" r:id="rId35"/>
+    <p:sldId id="290" r:id="rId36"/>
+    <p:sldId id="291" r:id="rId37"/>
+    <p:sldId id="292" r:id="rId38"/>
+    <p:sldId id="293" r:id="rId39"/>
+    <p:sldId id="294" r:id="rId40"/>
+    <p:sldId id="295" r:id="rId41"/>
   </p:sldIdLst>
-  <p:sldSz cx="12191695" cy="6858000" type="screen4x3"/>
+  <p:sldSz cx="12192000" cy="6858000"/>
   <p:notesSz cx="6858000" cy="9144000"/>
   <p:defaultTextStyle>
     <a:defPPr>
@@ -143,11 +146,27 @@
       </a:defRPr>
     </a:lvl9pPr>
   </p:defaultTextStyle>
+  <p:extLst>
+    <p:ext uri="{EFAFB233-063F-42B5-8137-9DF3F51BA10A}">
+      <p15:sldGuideLst xmlns:p15="http://schemas.microsoft.com/office/powerpoint/2012/main">
+        <p15:guide id="1" orient="horz" pos="2160">
+          <p15:clr>
+            <a:srgbClr val="A4A3A4"/>
+          </p15:clr>
+        </p15:guide>
+        <p15:guide id="2" pos="2880">
+          <p15:clr>
+            <a:srgbClr val="A4A3A4"/>
+          </p15:clr>
+        </p15:guide>
+      </p15:sldGuideLst>
+    </p:ext>
+  </p:extLst>
 </p:presentation>
 </file>
 
 <file path=ppt/notesMasters/notesMaster1.xml><?xml version="1.0" encoding="utf-8"?>
-<p:notesMaster xmlns:a="http://schemas.openxmlformats.org/drawingml/2006/main" xmlns:p="http://schemas.openxmlformats.org/presentationml/2006/main" xmlns:r="http://schemas.openxmlformats.org/officeDocument/2006/relationships">
+<p:notesMaster xmlns:a="http://schemas.openxmlformats.org/drawingml/2006/main" xmlns:r="http://schemas.openxmlformats.org/officeDocument/2006/relationships" xmlns:p="http://schemas.openxmlformats.org/presentationml/2006/main">
   <p:cSld>
     <p:bg>
       <p:bgRef idx="1001">
@@ -170,7 +189,7 @@
       </p:grpSpPr>
       <p:sp>
         <p:nvSpPr>
-          <p:cNvPr id="2" name="Header Placeholder 1"/>
+          <p:cNvPr id="2" name="머리글 개체 틀 1"/>
           <p:cNvSpPr>
             <a:spLocks noGrp="1"/>
           </p:cNvSpPr>
@@ -181,7 +200,7 @@
         <p:spPr>
           <a:xfrm>
             <a:off x="0" y="0"/>
-            <a:ext cx="2971800" cy="457200"/>
+            <a:ext cx="2971800" cy="458788"/>
           </a:xfrm>
           <a:prstGeom prst="rect">
             <a:avLst/>
@@ -195,13 +214,13 @@
             </a:lvl1pPr>
           </a:lstStyle>
           <a:p>
-            <a:endParaRPr lang="en-US"/>
-          </a:p>
-        </p:txBody>
-      </p:sp>
-      <p:sp>
-        <p:nvSpPr>
-          <p:cNvPr id="3" name="Date Placeholder 2"/>
+            <a:endParaRPr lang="ko-KR" altLang="en-US"/>
+          </a:p>
+        </p:txBody>
+      </p:sp>
+      <p:sp>
+        <p:nvSpPr>
+          <p:cNvPr id="3" name="날짜 개체 틀 2"/>
           <p:cNvSpPr>
             <a:spLocks noGrp="1"/>
           </p:cNvSpPr>
@@ -212,7 +231,7 @@
         <p:spPr>
           <a:xfrm>
             <a:off x="3884613" y="0"/>
-            <a:ext cx="2971800" cy="457200"/>
+            <a:ext cx="2971800" cy="458788"/>
           </a:xfrm>
           <a:prstGeom prst="rect">
             <a:avLst/>
@@ -226,17 +245,17 @@
             </a:lvl1pPr>
           </a:lstStyle>
           <a:p>
-            <a:fld id="{0F89C1C7-3DCD-1040-A9CF-14679D8B5DDD}" type="datetimeFigureOut">
-              <a:rPr lang="en-US" smtClean="0"/>
-              <a:t>10/17/16</a:t>
+            <a:fld id="{6DE22C5B-FB2A-4E87-94E2-4CB0AAD3A5FF}" type="datetimeFigureOut">
+              <a:rPr lang="ko-KR" altLang="en-US" smtClean="0"/>
+              <a:t>2026-10-29</a:t>
             </a:fld>
-            <a:endParaRPr lang="en-US"/>
-          </a:p>
-        </p:txBody>
-      </p:sp>
-      <p:sp>
-        <p:nvSpPr>
-          <p:cNvPr id="4" name="Slide Image Placeholder 3"/>
+            <a:endParaRPr lang="ko-KR" altLang="en-US"/>
+          </a:p>
+        </p:txBody>
+      </p:sp>
+      <p:sp>
+        <p:nvSpPr>
+          <p:cNvPr id="4" name="슬라이드 이미지 개체 틀 3"/>
           <p:cNvSpPr>
             <a:spLocks noGrp="1" noRot="1" noChangeAspect="1"/>
           </p:cNvSpPr>
@@ -246,8 +265,8 @@
         </p:nvSpPr>
         <p:spPr>
           <a:xfrm>
-            <a:off x="1143000" y="685800"/>
-            <a:ext cx="4572000" cy="3429000"/>
+            <a:off x="685800" y="1143000"/>
+            <a:ext cx="5486400" cy="3086100"/>
           </a:xfrm>
           <a:prstGeom prst="rect">
             <a:avLst/>
@@ -263,13 +282,13 @@
           <a:bodyPr vert="horz" lIns="91440" tIns="45720" rIns="91440" bIns="45720" rtlCol="0" anchor="ctr"/>
           <a:lstStyle/>
           <a:p>
-            <a:endParaRPr lang="en-US"/>
-          </a:p>
-        </p:txBody>
-      </p:sp>
-      <p:sp>
-        <p:nvSpPr>
-          <p:cNvPr id="5" name="Notes Placeholder 4"/>
+            <a:endParaRPr lang="ko-KR" altLang="en-US"/>
+          </a:p>
+        </p:txBody>
+      </p:sp>
+      <p:sp>
+        <p:nvSpPr>
+          <p:cNvPr id="5" name="슬라이드 노트 개체 틀 4"/>
           <p:cNvSpPr>
             <a:spLocks noGrp="1"/>
           </p:cNvSpPr>
@@ -279,8 +298,8 @@
         </p:nvSpPr>
         <p:spPr>
           <a:xfrm>
-            <a:off x="685800" y="4343400"/>
-            <a:ext cx="5486400" cy="4114800"/>
+            <a:off x="685800" y="4400550"/>
+            <a:ext cx="5486400" cy="3600450"/>
           </a:xfrm>
           <a:prstGeom prst="rect">
             <a:avLst/>
@@ -292,44 +311,43 @@
           <a:p>
             <a:pPr lvl="0"/>
             <a:r>
-              <a:rPr lang="en-US" smtClean="0"/>
-              <a:t>Click to edit Master text styles</a:t>
+              <a:rPr lang="ko-KR" altLang="en-US"/>
+              <a:t>마스터 텍스트 스타일을 편집하려면 클릭</a:t>
             </a:r>
           </a:p>
           <a:p>
             <a:pPr lvl="1"/>
             <a:r>
-              <a:rPr lang="en-US" smtClean="0"/>
-              <a:t>Second level</a:t>
+              <a:rPr lang="ko-KR" altLang="en-US"/>
+              <a:t>두 번째 수준</a:t>
             </a:r>
           </a:p>
           <a:p>
             <a:pPr lvl="2"/>
             <a:r>
-              <a:rPr lang="en-US" smtClean="0"/>
-              <a:t>Third level</a:t>
+              <a:rPr lang="ko-KR" altLang="en-US"/>
+              <a:t>세 번째 수준</a:t>
             </a:r>
           </a:p>
           <a:p>
             <a:pPr lvl="3"/>
             <a:r>
-              <a:rPr lang="en-US" smtClean="0"/>
-              <a:t>Fourth level</a:t>
+              <a:rPr lang="ko-KR" altLang="en-US"/>
+              <a:t>네 번째 수준</a:t>
             </a:r>
           </a:p>
           <a:p>
             <a:pPr lvl="4"/>
             <a:r>
-              <a:rPr lang="en-US" smtClean="0"/>
-              <a:t>Fifth level</a:t>
-            </a:r>
-            <a:endParaRPr lang="en-US"/>
-          </a:p>
-        </p:txBody>
-      </p:sp>
-      <p:sp>
-        <p:nvSpPr>
-          <p:cNvPr id="6" name="Footer Placeholder 5"/>
+              <a:rPr lang="ko-KR" altLang="en-US"/>
+              <a:t>다섯 번째 수준</a:t>
+            </a:r>
+          </a:p>
+        </p:txBody>
+      </p:sp>
+      <p:sp>
+        <p:nvSpPr>
+          <p:cNvPr id="6" name="바닥글 개체 틀 5"/>
           <p:cNvSpPr>
             <a:spLocks noGrp="1"/>
           </p:cNvSpPr>
@@ -340,7 +358,7 @@
         <p:spPr>
           <a:xfrm>
             <a:off x="0" y="8685213"/>
-            <a:ext cx="2971800" cy="457200"/>
+            <a:ext cx="2971800" cy="458787"/>
           </a:xfrm>
           <a:prstGeom prst="rect">
             <a:avLst/>
@@ -354,13 +372,13 @@
             </a:lvl1pPr>
           </a:lstStyle>
           <a:p>
-            <a:endParaRPr lang="en-US"/>
-          </a:p>
-        </p:txBody>
-      </p:sp>
-      <p:sp>
-        <p:nvSpPr>
-          <p:cNvPr id="7" name="Slide Number Placeholder 6"/>
+            <a:endParaRPr lang="ko-KR" altLang="en-US"/>
+          </a:p>
+        </p:txBody>
+      </p:sp>
+      <p:sp>
+        <p:nvSpPr>
+          <p:cNvPr id="7" name="슬라이드 번호 개체 틀 6"/>
           <p:cNvSpPr>
             <a:spLocks noGrp="1"/>
           </p:cNvSpPr>
@@ -371,7 +389,7 @@
         <p:spPr>
           <a:xfrm>
             <a:off x="3884613" y="8685213"/>
-            <a:ext cx="2971800" cy="457200"/>
+            <a:ext cx="2971800" cy="458787"/>
           </a:xfrm>
           <a:prstGeom prst="rect">
             <a:avLst/>
@@ -385,24 +403,24 @@
             </a:lvl1pPr>
           </a:lstStyle>
           <a:p>
-            <a:fld id="{BB5E49A5-4136-284D-997B-48E1D791AD67}" type="slidenum">
-              <a:rPr lang="en-US" smtClean="0"/>
+            <a:fld id="{7603783B-BF6E-4A1F-9FE2-29526608DBA0}" type="slidenum">
+              <a:rPr lang="ko-KR" altLang="en-US" smtClean="0"/>
               <a:t>‹#›</a:t>
             </a:fld>
-            <a:endParaRPr lang="en-US"/>
+            <a:endParaRPr lang="ko-KR" altLang="en-US"/>
           </a:p>
         </p:txBody>
       </p:sp>
     </p:spTree>
     <p:extLst>
       <p:ext uri="{BB962C8B-B14F-4D97-AF65-F5344CB8AC3E}">
-        <p14:creationId xmlns:p14="http://schemas.microsoft.com/office/powerpoint/2010/main" val="2623252185"/>
+        <p14:creationId xmlns:p14="http://schemas.microsoft.com/office/powerpoint/2010/main" val="2173852609"/>
       </p:ext>
     </p:extLst>
   </p:cSld>
   <p:clrMap bg1="lt1" tx1="dk1" bg2="lt2" tx2="dk2" accent1="accent1" accent2="accent2" accent3="accent3" accent4="accent4" accent5="accent5" accent6="accent6" hlink="hlink" folHlink="folHlink"/>
   <p:notesStyle>
-    <a:lvl1pPr marL="0" algn="l" defTabSz="457200" rtl="0" eaLnBrk="1" latinLnBrk="0" hangingPunct="1">
+    <a:lvl1pPr marL="0" algn="l" defTabSz="914400" rtl="0" eaLnBrk="1" latinLnBrk="1" hangingPunct="1">
       <a:defRPr sz="1200" kern="1200">
         <a:solidFill>
           <a:schemeClr val="tx1"/>
@@ -412,7 +430,7 @@
         <a:cs typeface="+mn-cs"/>
       </a:defRPr>
     </a:lvl1pPr>
-    <a:lvl2pPr marL="457200" algn="l" defTabSz="457200" rtl="0" eaLnBrk="1" latinLnBrk="0" hangingPunct="1">
+    <a:lvl2pPr marL="457200" algn="l" defTabSz="914400" rtl="0" eaLnBrk="1" latinLnBrk="1" hangingPunct="1">
       <a:defRPr sz="1200" kern="1200">
         <a:solidFill>
           <a:schemeClr val="tx1"/>
@@ -422,7 +440,7 @@
         <a:cs typeface="+mn-cs"/>
       </a:defRPr>
     </a:lvl2pPr>
-    <a:lvl3pPr marL="914400" algn="l" defTabSz="457200" rtl="0" eaLnBrk="1" latinLnBrk="0" hangingPunct="1">
+    <a:lvl3pPr marL="914400" algn="l" defTabSz="914400" rtl="0" eaLnBrk="1" latinLnBrk="1" hangingPunct="1">
       <a:defRPr sz="1200" kern="1200">
         <a:solidFill>
           <a:schemeClr val="tx1"/>
@@ -432,7 +450,7 @@
         <a:cs typeface="+mn-cs"/>
       </a:defRPr>
     </a:lvl3pPr>
-    <a:lvl4pPr marL="1371600" algn="l" defTabSz="457200" rtl="0" eaLnBrk="1" latinLnBrk="0" hangingPunct="1">
+    <a:lvl4pPr marL="1371600" algn="l" defTabSz="914400" rtl="0" eaLnBrk="1" latinLnBrk="1" hangingPunct="1">
       <a:defRPr sz="1200" kern="1200">
         <a:solidFill>
           <a:schemeClr val="tx1"/>
@@ -442,7 +460,7 @@
         <a:cs typeface="+mn-cs"/>
       </a:defRPr>
     </a:lvl4pPr>
-    <a:lvl5pPr marL="1828800" algn="l" defTabSz="457200" rtl="0" eaLnBrk="1" latinLnBrk="0" hangingPunct="1">
+    <a:lvl5pPr marL="1828800" algn="l" defTabSz="914400" rtl="0" eaLnBrk="1" latinLnBrk="1" hangingPunct="1">
       <a:defRPr sz="1200" kern="1200">
         <a:solidFill>
           <a:schemeClr val="tx1"/>
@@ -452,7 +470,7 @@
         <a:cs typeface="+mn-cs"/>
       </a:defRPr>
     </a:lvl5pPr>
-    <a:lvl6pPr marL="2286000" algn="l" defTabSz="457200" rtl="0" eaLnBrk="1" latinLnBrk="0" hangingPunct="1">
+    <a:lvl6pPr marL="2286000" algn="l" defTabSz="914400" rtl="0" eaLnBrk="1" latinLnBrk="1" hangingPunct="1">
       <a:defRPr sz="1200" kern="1200">
         <a:solidFill>
           <a:schemeClr val="tx1"/>
@@ -462,7 +480,7 @@
         <a:cs typeface="+mn-cs"/>
       </a:defRPr>
     </a:lvl6pPr>
-    <a:lvl7pPr marL="2743200" algn="l" defTabSz="457200" rtl="0" eaLnBrk="1" latinLnBrk="0" hangingPunct="1">
+    <a:lvl7pPr marL="2743200" algn="l" defTabSz="914400" rtl="0" eaLnBrk="1" latinLnBrk="1" hangingPunct="1">
       <a:defRPr sz="1200" kern="1200">
         <a:solidFill>
           <a:schemeClr val="tx1"/>
@@ -472,7 +490,7 @@
         <a:cs typeface="+mn-cs"/>
       </a:defRPr>
     </a:lvl7pPr>
-    <a:lvl8pPr marL="3200400" algn="l" defTabSz="457200" rtl="0" eaLnBrk="1" latinLnBrk="0" hangingPunct="1">
+    <a:lvl8pPr marL="3200400" algn="l" defTabSz="914400" rtl="0" eaLnBrk="1" latinLnBrk="1" hangingPunct="1">
       <a:defRPr sz="1200" kern="1200">
         <a:solidFill>
           <a:schemeClr val="tx1"/>
@@ -482,7 +500,7 @@
         <a:cs typeface="+mn-cs"/>
       </a:defRPr>
     </a:lvl8pPr>
-    <a:lvl9pPr marL="3657600" algn="l" defTabSz="457200" rtl="0" eaLnBrk="1" latinLnBrk="0" hangingPunct="1">
+    <a:lvl9pPr marL="3657600" algn="l" defTabSz="914400" rtl="0" eaLnBrk="1" latinLnBrk="1" hangingPunct="1">
       <a:defRPr sz="1200" kern="1200">
         <a:solidFill>
           <a:schemeClr val="tx1"/>
@@ -497,7 +515,7 @@
 </file>
 
 <file path=ppt/notesSlides/notesSlide1.xml><?xml version="1.0" encoding="utf-8"?>
-<p:notes xmlns:a="http://schemas.openxmlformats.org/drawingml/2006/main" xmlns:p="http://schemas.openxmlformats.org/presentationml/2006/main" xmlns:r="http://schemas.openxmlformats.org/officeDocument/2006/relationships">
+<p:notes xmlns:a="http://schemas.openxmlformats.org/drawingml/2006/main" xmlns:r="http://schemas.openxmlformats.org/officeDocument/2006/relationships" xmlns:p="http://schemas.openxmlformats.org/presentationml/2006/main">
   <p:cSld>
     <p:spTree>
       <p:nvGrpSpPr>
@@ -517,7 +535,7 @@
         <p:nvSpPr>
           <p:cNvPr id="2" name="Slide Image Placeholder 1"/>
           <p:cNvSpPr>
-            <a:spLocks noGrp="1"/>
+            <a:spLocks noGrp="1" noRot="1" noChangeAspect="1"/>
           </p:cNvSpPr>
           <p:nvPr>
             <p:ph type="sldImg" idx="2"/>
@@ -532,7 +550,7 @@
             <a:spLocks noGrp="1"/>
           </p:cNvSpPr>
           <p:nvPr>
-            <p:ph type="body" idx="3" sz="quarter"/>
+            <p:ph type="body" sz="quarter" idx="3"/>
           </p:nvPr>
         </p:nvSpPr>
         <p:spPr/>
@@ -553,7 +571,7 @@
             <a:spLocks noGrp="1"/>
           </p:cNvSpPr>
           <p:nvPr>
-            <p:ph type="sldNum" idx="5" sz="quarter"/>
+            <p:ph type="sldNum" sz="quarter" idx="5"/>
           </p:nvPr>
         </p:nvSpPr>
         <p:spPr/>
@@ -567,7 +585,7 @@
 </file>
 
 <file path=ppt/notesSlides/notesSlide10.xml><?xml version="1.0" encoding="utf-8"?>
-<p:notes xmlns:a="http://schemas.openxmlformats.org/drawingml/2006/main" xmlns:p="http://schemas.openxmlformats.org/presentationml/2006/main" xmlns:r="http://schemas.openxmlformats.org/officeDocument/2006/relationships">
+<p:notes xmlns:a="http://schemas.openxmlformats.org/drawingml/2006/main" xmlns:r="http://schemas.openxmlformats.org/officeDocument/2006/relationships" xmlns:p="http://schemas.openxmlformats.org/presentationml/2006/main">
   <p:cSld>
     <p:spTree>
       <p:nvGrpSpPr>
@@ -587,7 +605,7 @@
         <p:nvSpPr>
           <p:cNvPr id="2" name="Slide Image Placeholder 1"/>
           <p:cNvSpPr>
-            <a:spLocks noGrp="1"/>
+            <a:spLocks noGrp="1" noRot="1" noChangeAspect="1"/>
           </p:cNvSpPr>
           <p:nvPr>
             <p:ph type="sldImg" idx="2"/>
@@ -602,7 +620,7 @@
             <a:spLocks noGrp="1"/>
           </p:cNvSpPr>
           <p:nvPr>
-            <p:ph type="body" idx="3" sz="quarter"/>
+            <p:ph type="body" sz="quarter" idx="3"/>
           </p:nvPr>
         </p:nvSpPr>
         <p:spPr/>
@@ -623,7 +641,7 @@
             <a:spLocks noGrp="1"/>
           </p:cNvSpPr>
           <p:nvPr>
-            <p:ph type="sldNum" idx="5" sz="quarter"/>
+            <p:ph type="sldNum" sz="quarter" idx="5"/>
           </p:nvPr>
         </p:nvSpPr>
         <p:spPr/>
@@ -637,7 +655,7 @@
 </file>
 
 <file path=ppt/notesSlides/notesSlide11.xml><?xml version="1.0" encoding="utf-8"?>
-<p:notes xmlns:a="http://schemas.openxmlformats.org/drawingml/2006/main" xmlns:p="http://schemas.openxmlformats.org/presentationml/2006/main" xmlns:r="http://schemas.openxmlformats.org/officeDocument/2006/relationships">
+<p:notes xmlns:a="http://schemas.openxmlformats.org/drawingml/2006/main" xmlns:r="http://schemas.openxmlformats.org/officeDocument/2006/relationships" xmlns:p="http://schemas.openxmlformats.org/presentationml/2006/main">
   <p:cSld>
     <p:spTree>
       <p:nvGrpSpPr>
@@ -657,7 +675,7 @@
         <p:nvSpPr>
           <p:cNvPr id="2" name="Slide Image Placeholder 1"/>
           <p:cNvSpPr>
-            <a:spLocks noGrp="1"/>
+            <a:spLocks noGrp="1" noRot="1" noChangeAspect="1"/>
           </p:cNvSpPr>
           <p:nvPr>
             <p:ph type="sldImg" idx="2"/>
@@ -672,7 +690,7 @@
             <a:spLocks noGrp="1"/>
           </p:cNvSpPr>
           <p:nvPr>
-            <p:ph type="body" idx="3" sz="quarter"/>
+            <p:ph type="body" sz="quarter" idx="3"/>
           </p:nvPr>
         </p:nvSpPr>
         <p:spPr/>
@@ -693,7 +711,7 @@
             <a:spLocks noGrp="1"/>
           </p:cNvSpPr>
           <p:nvPr>
-            <p:ph type="sldNum" idx="5" sz="quarter"/>
+            <p:ph type="sldNum" sz="quarter" idx="5"/>
           </p:nvPr>
         </p:nvSpPr>
         <p:spPr/>
@@ -707,7 +725,7 @@
 </file>
 
 <file path=ppt/notesSlides/notesSlide12.xml><?xml version="1.0" encoding="utf-8"?>
-<p:notes xmlns:a="http://schemas.openxmlformats.org/drawingml/2006/main" xmlns:p="http://schemas.openxmlformats.org/presentationml/2006/main" xmlns:r="http://schemas.openxmlformats.org/officeDocument/2006/relationships">
+<p:notes xmlns:a="http://schemas.openxmlformats.org/drawingml/2006/main" xmlns:r="http://schemas.openxmlformats.org/officeDocument/2006/relationships" xmlns:p="http://schemas.openxmlformats.org/presentationml/2006/main">
   <p:cSld>
     <p:spTree>
       <p:nvGrpSpPr>
@@ -727,7 +745,7 @@
         <p:nvSpPr>
           <p:cNvPr id="2" name="Slide Image Placeholder 1"/>
           <p:cNvSpPr>
-            <a:spLocks noGrp="1"/>
+            <a:spLocks noGrp="1" noRot="1" noChangeAspect="1"/>
           </p:cNvSpPr>
           <p:nvPr>
             <p:ph type="sldImg" idx="2"/>
@@ -742,7 +760,7 @@
             <a:spLocks noGrp="1"/>
           </p:cNvSpPr>
           <p:nvPr>
-            <p:ph type="body" idx="3" sz="quarter"/>
+            <p:ph type="body" sz="quarter" idx="3"/>
           </p:nvPr>
         </p:nvSpPr>
         <p:spPr/>
@@ -763,7 +781,7 @@
             <a:spLocks noGrp="1"/>
           </p:cNvSpPr>
           <p:nvPr>
-            <p:ph type="sldNum" idx="5" sz="quarter"/>
+            <p:ph type="sldNum" sz="quarter" idx="5"/>
           </p:nvPr>
         </p:nvSpPr>
         <p:spPr/>
@@ -777,7 +795,7 @@
 </file>
 
 <file path=ppt/notesSlides/notesSlide13.xml><?xml version="1.0" encoding="utf-8"?>
-<p:notes xmlns:a="http://schemas.openxmlformats.org/drawingml/2006/main" xmlns:p="http://schemas.openxmlformats.org/presentationml/2006/main" xmlns:r="http://schemas.openxmlformats.org/officeDocument/2006/relationships">
+<p:notes xmlns:a="http://schemas.openxmlformats.org/drawingml/2006/main" xmlns:r="http://schemas.openxmlformats.org/officeDocument/2006/relationships" xmlns:p="http://schemas.openxmlformats.org/presentationml/2006/main">
   <p:cSld>
     <p:spTree>
       <p:nvGrpSpPr>
@@ -797,7 +815,7 @@
         <p:nvSpPr>
           <p:cNvPr id="2" name="Slide Image Placeholder 1"/>
           <p:cNvSpPr>
-            <a:spLocks noGrp="1"/>
+            <a:spLocks noGrp="1" noRot="1" noChangeAspect="1"/>
           </p:cNvSpPr>
           <p:nvPr>
             <p:ph type="sldImg" idx="2"/>
@@ -812,7 +830,7 @@
             <a:spLocks noGrp="1"/>
           </p:cNvSpPr>
           <p:nvPr>
-            <p:ph type="body" idx="3" sz="quarter"/>
+            <p:ph type="body" sz="quarter" idx="3"/>
           </p:nvPr>
         </p:nvSpPr>
         <p:spPr/>
@@ -833,7 +851,7 @@
             <a:spLocks noGrp="1"/>
           </p:cNvSpPr>
           <p:nvPr>
-            <p:ph type="sldNum" idx="5" sz="quarter"/>
+            <p:ph type="sldNum" sz="quarter" idx="5"/>
           </p:nvPr>
         </p:nvSpPr>
         <p:spPr/>
@@ -847,7 +865,7 @@
 </file>
 
 <file path=ppt/notesSlides/notesSlide14.xml><?xml version="1.0" encoding="utf-8"?>
-<p:notes xmlns:a="http://schemas.openxmlformats.org/drawingml/2006/main" xmlns:p="http://schemas.openxmlformats.org/presentationml/2006/main" xmlns:r="http://schemas.openxmlformats.org/officeDocument/2006/relationships">
+<p:notes xmlns:a="http://schemas.openxmlformats.org/drawingml/2006/main" xmlns:r="http://schemas.openxmlformats.org/officeDocument/2006/relationships" xmlns:p="http://schemas.openxmlformats.org/presentationml/2006/main">
   <p:cSld>
     <p:spTree>
       <p:nvGrpSpPr>
@@ -867,7 +885,7 @@
         <p:nvSpPr>
           <p:cNvPr id="2" name="Slide Image Placeholder 1"/>
           <p:cNvSpPr>
-            <a:spLocks noGrp="1"/>
+            <a:spLocks noGrp="1" noRot="1" noChangeAspect="1"/>
           </p:cNvSpPr>
           <p:nvPr>
             <p:ph type="sldImg" idx="2"/>
@@ -882,7 +900,7 @@
             <a:spLocks noGrp="1"/>
           </p:cNvSpPr>
           <p:nvPr>
-            <p:ph type="body" idx="3" sz="quarter"/>
+            <p:ph type="body" sz="quarter" idx="3"/>
           </p:nvPr>
         </p:nvSpPr>
         <p:spPr/>
@@ -903,7 +921,7 @@
             <a:spLocks noGrp="1"/>
           </p:cNvSpPr>
           <p:nvPr>
-            <p:ph type="sldNum" idx="5" sz="quarter"/>
+            <p:ph type="sldNum" sz="quarter" idx="5"/>
           </p:nvPr>
         </p:nvSpPr>
         <p:spPr/>
@@ -917,7 +935,7 @@
 </file>
 
 <file path=ppt/notesSlides/notesSlide15.xml><?xml version="1.0" encoding="utf-8"?>
-<p:notes xmlns:a="http://schemas.openxmlformats.org/drawingml/2006/main" xmlns:p="http://schemas.openxmlformats.org/presentationml/2006/main" xmlns:r="http://schemas.openxmlformats.org/officeDocument/2006/relationships">
+<p:notes xmlns:a="http://schemas.openxmlformats.org/drawingml/2006/main" xmlns:r="http://schemas.openxmlformats.org/officeDocument/2006/relationships" xmlns:p="http://schemas.openxmlformats.org/presentationml/2006/main">
   <p:cSld>
     <p:spTree>
       <p:nvGrpSpPr>
@@ -937,7 +955,7 @@
         <p:nvSpPr>
           <p:cNvPr id="2" name="Slide Image Placeholder 1"/>
           <p:cNvSpPr>
-            <a:spLocks noGrp="1"/>
+            <a:spLocks noGrp="1" noRot="1" noChangeAspect="1"/>
           </p:cNvSpPr>
           <p:nvPr>
             <p:ph type="sldImg" idx="2"/>
@@ -952,7 +970,7 @@
             <a:spLocks noGrp="1"/>
           </p:cNvSpPr>
           <p:nvPr>
-            <p:ph type="body" idx="3" sz="quarter"/>
+            <p:ph type="body" sz="quarter" idx="3"/>
           </p:nvPr>
         </p:nvSpPr>
         <p:spPr/>
@@ -973,7 +991,7 @@
             <a:spLocks noGrp="1"/>
           </p:cNvSpPr>
           <p:nvPr>
-            <p:ph type="sldNum" idx="5" sz="quarter"/>
+            <p:ph type="sldNum" sz="quarter" idx="5"/>
           </p:nvPr>
         </p:nvSpPr>
         <p:spPr/>
@@ -987,7 +1005,7 @@
 </file>
 
 <file path=ppt/notesSlides/notesSlide16.xml><?xml version="1.0" encoding="utf-8"?>
-<p:notes xmlns:a="http://schemas.openxmlformats.org/drawingml/2006/main" xmlns:p="http://schemas.openxmlformats.org/presentationml/2006/main" xmlns:r="http://schemas.openxmlformats.org/officeDocument/2006/relationships">
+<p:notes xmlns:a="http://schemas.openxmlformats.org/drawingml/2006/main" xmlns:r="http://schemas.openxmlformats.org/officeDocument/2006/relationships" xmlns:p="http://schemas.openxmlformats.org/presentationml/2006/main">
   <p:cSld>
     <p:spTree>
       <p:nvGrpSpPr>
@@ -1007,7 +1025,7 @@
         <p:nvSpPr>
           <p:cNvPr id="2" name="Slide Image Placeholder 1"/>
           <p:cNvSpPr>
-            <a:spLocks noGrp="1"/>
+            <a:spLocks noGrp="1" noRot="1" noChangeAspect="1"/>
           </p:cNvSpPr>
           <p:nvPr>
             <p:ph type="sldImg" idx="2"/>
@@ -1022,7 +1040,7 @@
             <a:spLocks noGrp="1"/>
           </p:cNvSpPr>
           <p:nvPr>
-            <p:ph type="body" idx="3" sz="quarter"/>
+            <p:ph type="body" sz="quarter" idx="3"/>
           </p:nvPr>
         </p:nvSpPr>
         <p:spPr/>
@@ -1043,7 +1061,7 @@
             <a:spLocks noGrp="1"/>
           </p:cNvSpPr>
           <p:nvPr>
-            <p:ph type="sldNum" idx="5" sz="quarter"/>
+            <p:ph type="sldNum" sz="quarter" idx="5"/>
           </p:nvPr>
         </p:nvSpPr>
         <p:spPr/>
@@ -1057,7 +1075,7 @@
 </file>
 
 <file path=ppt/notesSlides/notesSlide17.xml><?xml version="1.0" encoding="utf-8"?>
-<p:notes xmlns:a="http://schemas.openxmlformats.org/drawingml/2006/main" xmlns:p="http://schemas.openxmlformats.org/presentationml/2006/main" xmlns:r="http://schemas.openxmlformats.org/officeDocument/2006/relationships">
+<p:notes xmlns:a="http://schemas.openxmlformats.org/drawingml/2006/main" xmlns:r="http://schemas.openxmlformats.org/officeDocument/2006/relationships" xmlns:p="http://schemas.openxmlformats.org/presentationml/2006/main">
   <p:cSld>
     <p:spTree>
       <p:nvGrpSpPr>
@@ -1077,7 +1095,7 @@
         <p:nvSpPr>
           <p:cNvPr id="2" name="Slide Image Placeholder 1"/>
           <p:cNvSpPr>
-            <a:spLocks noGrp="1"/>
+            <a:spLocks noGrp="1" noRot="1" noChangeAspect="1"/>
           </p:cNvSpPr>
           <p:nvPr>
             <p:ph type="sldImg" idx="2"/>
@@ -1092,7 +1110,7 @@
             <a:spLocks noGrp="1"/>
           </p:cNvSpPr>
           <p:nvPr>
-            <p:ph type="body" idx="3" sz="quarter"/>
+            <p:ph type="body" sz="quarter" idx="3"/>
           </p:nvPr>
         </p:nvSpPr>
         <p:spPr/>
@@ -1113,7 +1131,7 @@
             <a:spLocks noGrp="1"/>
           </p:cNvSpPr>
           <p:nvPr>
-            <p:ph type="sldNum" idx="5" sz="quarter"/>
+            <p:ph type="sldNum" sz="quarter" idx="5"/>
           </p:nvPr>
         </p:nvSpPr>
         <p:spPr/>
@@ -1127,7 +1145,7 @@
 </file>
 
 <file path=ppt/notesSlides/notesSlide18.xml><?xml version="1.0" encoding="utf-8"?>
-<p:notes xmlns:a="http://schemas.openxmlformats.org/drawingml/2006/main" xmlns:p="http://schemas.openxmlformats.org/presentationml/2006/main" xmlns:r="http://schemas.openxmlformats.org/officeDocument/2006/relationships">
+<p:notes xmlns:a="http://schemas.openxmlformats.org/drawingml/2006/main" xmlns:r="http://schemas.openxmlformats.org/officeDocument/2006/relationships" xmlns:p="http://schemas.openxmlformats.org/presentationml/2006/main">
   <p:cSld>
     <p:spTree>
       <p:nvGrpSpPr>
@@ -1147,7 +1165,7 @@
         <p:nvSpPr>
           <p:cNvPr id="2" name="Slide Image Placeholder 1"/>
           <p:cNvSpPr>
-            <a:spLocks noGrp="1"/>
+            <a:spLocks noGrp="1" noRot="1" noChangeAspect="1"/>
           </p:cNvSpPr>
           <p:nvPr>
             <p:ph type="sldImg" idx="2"/>
@@ -1162,7 +1180,7 @@
             <a:spLocks noGrp="1"/>
           </p:cNvSpPr>
           <p:nvPr>
-            <p:ph type="body" idx="3" sz="quarter"/>
+            <p:ph type="body" sz="quarter" idx="3"/>
           </p:nvPr>
         </p:nvSpPr>
         <p:spPr/>
@@ -1183,7 +1201,7 @@
             <a:spLocks noGrp="1"/>
           </p:cNvSpPr>
           <p:nvPr>
-            <p:ph type="sldNum" idx="5" sz="quarter"/>
+            <p:ph type="sldNum" sz="quarter" idx="5"/>
           </p:nvPr>
         </p:nvSpPr>
         <p:spPr/>
@@ -1197,7 +1215,7 @@
 </file>
 
 <file path=ppt/notesSlides/notesSlide19.xml><?xml version="1.0" encoding="utf-8"?>
-<p:notes xmlns:a="http://schemas.openxmlformats.org/drawingml/2006/main" xmlns:p="http://schemas.openxmlformats.org/presentationml/2006/main" xmlns:r="http://schemas.openxmlformats.org/officeDocument/2006/relationships">
+<p:notes xmlns:a="http://schemas.openxmlformats.org/drawingml/2006/main" xmlns:r="http://schemas.openxmlformats.org/officeDocument/2006/relationships" xmlns:p="http://schemas.openxmlformats.org/presentationml/2006/main">
   <p:cSld>
     <p:spTree>
       <p:nvGrpSpPr>
@@ -1217,7 +1235,7 @@
         <p:nvSpPr>
           <p:cNvPr id="2" name="Slide Image Placeholder 1"/>
           <p:cNvSpPr>
-            <a:spLocks noGrp="1"/>
+            <a:spLocks noGrp="1" noRot="1" noChangeAspect="1"/>
           </p:cNvSpPr>
           <p:nvPr>
             <p:ph type="sldImg" idx="2"/>
@@ -1232,7 +1250,7 @@
             <a:spLocks noGrp="1"/>
           </p:cNvSpPr>
           <p:nvPr>
-            <p:ph type="body" idx="3" sz="quarter"/>
+            <p:ph type="body" sz="quarter" idx="3"/>
           </p:nvPr>
         </p:nvSpPr>
         <p:spPr/>
@@ -1253,7 +1271,7 @@
             <a:spLocks noGrp="1"/>
           </p:cNvSpPr>
           <p:nvPr>
-            <p:ph type="sldNum" idx="5" sz="quarter"/>
+            <p:ph type="sldNum" sz="quarter" idx="5"/>
           </p:nvPr>
         </p:nvSpPr>
         <p:spPr/>
@@ -1267,7 +1285,7 @@
 </file>
 
 <file path=ppt/notesSlides/notesSlide2.xml><?xml version="1.0" encoding="utf-8"?>
-<p:notes xmlns:a="http://schemas.openxmlformats.org/drawingml/2006/main" xmlns:p="http://schemas.openxmlformats.org/presentationml/2006/main" xmlns:r="http://schemas.openxmlformats.org/officeDocument/2006/relationships">
+<p:notes xmlns:a="http://schemas.openxmlformats.org/drawingml/2006/main" xmlns:r="http://schemas.openxmlformats.org/officeDocument/2006/relationships" xmlns:p="http://schemas.openxmlformats.org/presentationml/2006/main">
   <p:cSld>
     <p:spTree>
       <p:nvGrpSpPr>
@@ -1287,7 +1305,7 @@
         <p:nvSpPr>
           <p:cNvPr id="2" name="Slide Image Placeholder 1"/>
           <p:cNvSpPr>
-            <a:spLocks noGrp="1"/>
+            <a:spLocks noGrp="1" noRot="1" noChangeAspect="1"/>
           </p:cNvSpPr>
           <p:nvPr>
             <p:ph type="sldImg" idx="2"/>
@@ -1302,7 +1320,7 @@
             <a:spLocks noGrp="1"/>
           </p:cNvSpPr>
           <p:nvPr>
-            <p:ph type="body" idx="3" sz="quarter"/>
+            <p:ph type="body" sz="quarter" idx="3"/>
           </p:nvPr>
         </p:nvSpPr>
         <p:spPr/>
@@ -1323,7 +1341,7 @@
             <a:spLocks noGrp="1"/>
           </p:cNvSpPr>
           <p:nvPr>
-            <p:ph type="sldNum" idx="5" sz="quarter"/>
+            <p:ph type="sldNum" sz="quarter" idx="5"/>
           </p:nvPr>
         </p:nvSpPr>
         <p:spPr/>
@@ -1337,7 +1355,7 @@
 </file>
 
 <file path=ppt/notesSlides/notesSlide20.xml><?xml version="1.0" encoding="utf-8"?>
-<p:notes xmlns:a="http://schemas.openxmlformats.org/drawingml/2006/main" xmlns:p="http://schemas.openxmlformats.org/presentationml/2006/main" xmlns:r="http://schemas.openxmlformats.org/officeDocument/2006/relationships">
+<p:notes xmlns:a="http://schemas.openxmlformats.org/drawingml/2006/main" xmlns:r="http://schemas.openxmlformats.org/officeDocument/2006/relationships" xmlns:p="http://schemas.openxmlformats.org/presentationml/2006/main">
   <p:cSld>
     <p:spTree>
       <p:nvGrpSpPr>
@@ -1357,7 +1375,7 @@
         <p:nvSpPr>
           <p:cNvPr id="2" name="Slide Image Placeholder 1"/>
           <p:cNvSpPr>
-            <a:spLocks noGrp="1"/>
+            <a:spLocks noGrp="1" noRot="1" noChangeAspect="1"/>
           </p:cNvSpPr>
           <p:nvPr>
             <p:ph type="sldImg" idx="2"/>
@@ -1372,7 +1390,7 @@
             <a:spLocks noGrp="1"/>
           </p:cNvSpPr>
           <p:nvPr>
-            <p:ph type="body" idx="3" sz="quarter"/>
+            <p:ph type="body" sz="quarter" idx="3"/>
           </p:nvPr>
         </p:nvSpPr>
         <p:spPr/>
@@ -1393,7 +1411,7 @@
             <a:spLocks noGrp="1"/>
           </p:cNvSpPr>
           <p:nvPr>
-            <p:ph type="sldNum" idx="5" sz="quarter"/>
+            <p:ph type="sldNum" sz="quarter" idx="5"/>
           </p:nvPr>
         </p:nvSpPr>
         <p:spPr/>
@@ -1407,7 +1425,7 @@
 </file>
 
 <file path=ppt/notesSlides/notesSlide21.xml><?xml version="1.0" encoding="utf-8"?>
-<p:notes xmlns:a="http://schemas.openxmlformats.org/drawingml/2006/main" xmlns:p="http://schemas.openxmlformats.org/presentationml/2006/main" xmlns:r="http://schemas.openxmlformats.org/officeDocument/2006/relationships">
+<p:notes xmlns:a="http://schemas.openxmlformats.org/drawingml/2006/main" xmlns:r="http://schemas.openxmlformats.org/officeDocument/2006/relationships" xmlns:p="http://schemas.openxmlformats.org/presentationml/2006/main">
   <p:cSld>
     <p:spTree>
       <p:nvGrpSpPr>
@@ -1427,7 +1445,7 @@
         <p:nvSpPr>
           <p:cNvPr id="2" name="Slide Image Placeholder 1"/>
           <p:cNvSpPr>
-            <a:spLocks noGrp="1"/>
+            <a:spLocks noGrp="1" noRot="1" noChangeAspect="1"/>
           </p:cNvSpPr>
           <p:nvPr>
             <p:ph type="sldImg" idx="2"/>
@@ -1442,7 +1460,7 @@
             <a:spLocks noGrp="1"/>
           </p:cNvSpPr>
           <p:nvPr>
-            <p:ph type="body" idx="3" sz="quarter"/>
+            <p:ph type="body" sz="quarter" idx="3"/>
           </p:nvPr>
         </p:nvSpPr>
         <p:spPr/>
@@ -1463,7 +1481,7 @@
             <a:spLocks noGrp="1"/>
           </p:cNvSpPr>
           <p:nvPr>
-            <p:ph type="sldNum" idx="5" sz="quarter"/>
+            <p:ph type="sldNum" sz="quarter" idx="5"/>
           </p:nvPr>
         </p:nvSpPr>
         <p:spPr/>
@@ -1477,7 +1495,7 @@
 </file>
 
 <file path=ppt/notesSlides/notesSlide22.xml><?xml version="1.0" encoding="utf-8"?>
-<p:notes xmlns:a="http://schemas.openxmlformats.org/drawingml/2006/main" xmlns:p="http://schemas.openxmlformats.org/presentationml/2006/main" xmlns:r="http://schemas.openxmlformats.org/officeDocument/2006/relationships">
+<p:notes xmlns:a="http://schemas.openxmlformats.org/drawingml/2006/main" xmlns:r="http://schemas.openxmlformats.org/officeDocument/2006/relationships" xmlns:p="http://schemas.openxmlformats.org/presentationml/2006/main">
   <p:cSld>
     <p:spTree>
       <p:nvGrpSpPr>
@@ -1497,7 +1515,7 @@
         <p:nvSpPr>
           <p:cNvPr id="2" name="Slide Image Placeholder 1"/>
           <p:cNvSpPr>
-            <a:spLocks noGrp="1"/>
+            <a:spLocks noGrp="1" noRot="1" noChangeAspect="1"/>
           </p:cNvSpPr>
           <p:nvPr>
             <p:ph type="sldImg" idx="2"/>
@@ -1512,7 +1530,7 @@
             <a:spLocks noGrp="1"/>
           </p:cNvSpPr>
           <p:nvPr>
-            <p:ph type="body" idx="3" sz="quarter"/>
+            <p:ph type="body" sz="quarter" idx="3"/>
           </p:nvPr>
         </p:nvSpPr>
         <p:spPr/>
@@ -1533,7 +1551,7 @@
             <a:spLocks noGrp="1"/>
           </p:cNvSpPr>
           <p:nvPr>
-            <p:ph type="sldNum" idx="5" sz="quarter"/>
+            <p:ph type="sldNum" sz="quarter" idx="5"/>
           </p:nvPr>
         </p:nvSpPr>
         <p:spPr/>
@@ -1547,7 +1565,7 @@
 </file>
 
 <file path=ppt/notesSlides/notesSlide23.xml><?xml version="1.0" encoding="utf-8"?>
-<p:notes xmlns:a="http://schemas.openxmlformats.org/drawingml/2006/main" xmlns:p="http://schemas.openxmlformats.org/presentationml/2006/main" xmlns:r="http://schemas.openxmlformats.org/officeDocument/2006/relationships">
+<p:notes xmlns:a="http://schemas.openxmlformats.org/drawingml/2006/main" xmlns:r="http://schemas.openxmlformats.org/officeDocument/2006/relationships" xmlns:p="http://schemas.openxmlformats.org/presentationml/2006/main">
   <p:cSld>
     <p:spTree>
       <p:nvGrpSpPr>
@@ -1567,7 +1585,7 @@
         <p:nvSpPr>
           <p:cNvPr id="2" name="Slide Image Placeholder 1"/>
           <p:cNvSpPr>
-            <a:spLocks noGrp="1"/>
+            <a:spLocks noGrp="1" noRot="1" noChangeAspect="1"/>
           </p:cNvSpPr>
           <p:nvPr>
             <p:ph type="sldImg" idx="2"/>
@@ -1582,7 +1600,7 @@
             <a:spLocks noGrp="1"/>
           </p:cNvSpPr>
           <p:nvPr>
-            <p:ph type="body" idx="3" sz="quarter"/>
+            <p:ph type="body" sz="quarter" idx="3"/>
           </p:nvPr>
         </p:nvSpPr>
         <p:spPr/>
@@ -1603,7 +1621,7 @@
             <a:spLocks noGrp="1"/>
           </p:cNvSpPr>
           <p:nvPr>
-            <p:ph type="sldNum" idx="5" sz="quarter"/>
+            <p:ph type="sldNum" sz="quarter" idx="5"/>
           </p:nvPr>
         </p:nvSpPr>
         <p:spPr/>
@@ -1617,7 +1635,7 @@
 </file>
 
 <file path=ppt/notesSlides/notesSlide24.xml><?xml version="1.0" encoding="utf-8"?>
-<p:notes xmlns:a="http://schemas.openxmlformats.org/drawingml/2006/main" xmlns:p="http://schemas.openxmlformats.org/presentationml/2006/main" xmlns:r="http://schemas.openxmlformats.org/officeDocument/2006/relationships">
+<p:notes xmlns:a="http://schemas.openxmlformats.org/drawingml/2006/main" xmlns:r="http://schemas.openxmlformats.org/officeDocument/2006/relationships" xmlns:p="http://schemas.openxmlformats.org/presentationml/2006/main">
   <p:cSld>
     <p:spTree>
       <p:nvGrpSpPr>
@@ -1637,7 +1655,7 @@
         <p:nvSpPr>
           <p:cNvPr id="2" name="Slide Image Placeholder 1"/>
           <p:cNvSpPr>
-            <a:spLocks noGrp="1"/>
+            <a:spLocks noGrp="1" noRot="1" noChangeAspect="1"/>
           </p:cNvSpPr>
           <p:nvPr>
             <p:ph type="sldImg" idx="2"/>
@@ -1652,7 +1670,7 @@
             <a:spLocks noGrp="1"/>
           </p:cNvSpPr>
           <p:nvPr>
-            <p:ph type="body" idx="3" sz="quarter"/>
+            <p:ph type="body" sz="quarter" idx="3"/>
           </p:nvPr>
         </p:nvSpPr>
         <p:spPr/>
@@ -1673,7 +1691,7 @@
             <a:spLocks noGrp="1"/>
           </p:cNvSpPr>
           <p:nvPr>
-            <p:ph type="sldNum" idx="5" sz="quarter"/>
+            <p:ph type="sldNum" sz="quarter" idx="5"/>
           </p:nvPr>
         </p:nvSpPr>
         <p:spPr/>
@@ -1687,7 +1705,7 @@
 </file>
 
 <file path=ppt/notesSlides/notesSlide25.xml><?xml version="1.0" encoding="utf-8"?>
-<p:notes xmlns:a="http://schemas.openxmlformats.org/drawingml/2006/main" xmlns:p="http://schemas.openxmlformats.org/presentationml/2006/main" xmlns:r="http://schemas.openxmlformats.org/officeDocument/2006/relationships">
+<p:notes xmlns:a="http://schemas.openxmlformats.org/drawingml/2006/main" xmlns:r="http://schemas.openxmlformats.org/officeDocument/2006/relationships" xmlns:p="http://schemas.openxmlformats.org/presentationml/2006/main">
   <p:cSld>
     <p:spTree>
       <p:nvGrpSpPr>
@@ -1707,7 +1725,7 @@
         <p:nvSpPr>
           <p:cNvPr id="2" name="Slide Image Placeholder 1"/>
           <p:cNvSpPr>
-            <a:spLocks noGrp="1"/>
+            <a:spLocks noGrp="1" noRot="1" noChangeAspect="1"/>
           </p:cNvSpPr>
           <p:nvPr>
             <p:ph type="sldImg" idx="2"/>
@@ -1722,7 +1740,7 @@
             <a:spLocks noGrp="1"/>
           </p:cNvSpPr>
           <p:nvPr>
-            <p:ph type="body" idx="3" sz="quarter"/>
+            <p:ph type="body" sz="quarter" idx="3"/>
           </p:nvPr>
         </p:nvSpPr>
         <p:spPr/>
@@ -1743,7 +1761,7 @@
             <a:spLocks noGrp="1"/>
           </p:cNvSpPr>
           <p:nvPr>
-            <p:ph type="sldNum" idx="5" sz="quarter"/>
+            <p:ph type="sldNum" sz="quarter" idx="5"/>
           </p:nvPr>
         </p:nvSpPr>
         <p:spPr/>
@@ -1757,7 +1775,7 @@
 </file>
 
 <file path=ppt/notesSlides/notesSlide26.xml><?xml version="1.0" encoding="utf-8"?>
-<p:notes xmlns:a="http://schemas.openxmlformats.org/drawingml/2006/main" xmlns:p="http://schemas.openxmlformats.org/presentationml/2006/main" xmlns:r="http://schemas.openxmlformats.org/officeDocument/2006/relationships">
+<p:notes xmlns:a="http://schemas.openxmlformats.org/drawingml/2006/main" xmlns:r="http://schemas.openxmlformats.org/officeDocument/2006/relationships" xmlns:p="http://schemas.openxmlformats.org/presentationml/2006/main">
   <p:cSld>
     <p:spTree>
       <p:nvGrpSpPr>
@@ -1777,7 +1795,7 @@
         <p:nvSpPr>
           <p:cNvPr id="2" name="Slide Image Placeholder 1"/>
           <p:cNvSpPr>
-            <a:spLocks noGrp="1"/>
+            <a:spLocks noGrp="1" noRot="1" noChangeAspect="1"/>
           </p:cNvSpPr>
           <p:nvPr>
             <p:ph type="sldImg" idx="2"/>
@@ -1792,7 +1810,7 @@
             <a:spLocks noGrp="1"/>
           </p:cNvSpPr>
           <p:nvPr>
-            <p:ph type="body" idx="3" sz="quarter"/>
+            <p:ph type="body" sz="quarter" idx="3"/>
           </p:nvPr>
         </p:nvSpPr>
         <p:spPr/>
@@ -1813,7 +1831,7 @@
             <a:spLocks noGrp="1"/>
           </p:cNvSpPr>
           <p:nvPr>
-            <p:ph type="sldNum" idx="5" sz="quarter"/>
+            <p:ph type="sldNum" sz="quarter" idx="5"/>
           </p:nvPr>
         </p:nvSpPr>
         <p:spPr/>
@@ -1827,7 +1845,7 @@
 </file>
 
 <file path=ppt/notesSlides/notesSlide27.xml><?xml version="1.0" encoding="utf-8"?>
-<p:notes xmlns:a="http://schemas.openxmlformats.org/drawingml/2006/main" xmlns:p="http://schemas.openxmlformats.org/presentationml/2006/main" xmlns:r="http://schemas.openxmlformats.org/officeDocument/2006/relationships">
+<p:notes xmlns:a="http://schemas.openxmlformats.org/drawingml/2006/main" xmlns:r="http://schemas.openxmlformats.org/officeDocument/2006/relationships" xmlns:p="http://schemas.openxmlformats.org/presentationml/2006/main">
   <p:cSld>
     <p:spTree>
       <p:nvGrpSpPr>
@@ -1847,7 +1865,7 @@
         <p:nvSpPr>
           <p:cNvPr id="2" name="Slide Image Placeholder 1"/>
           <p:cNvSpPr>
-            <a:spLocks noGrp="1"/>
+            <a:spLocks noGrp="1" noRot="1" noChangeAspect="1"/>
           </p:cNvSpPr>
           <p:nvPr>
             <p:ph type="sldImg" idx="2"/>
@@ -1862,7 +1880,7 @@
             <a:spLocks noGrp="1"/>
           </p:cNvSpPr>
           <p:nvPr>
-            <p:ph type="body" idx="3" sz="quarter"/>
+            <p:ph type="body" sz="quarter" idx="3"/>
           </p:nvPr>
         </p:nvSpPr>
         <p:spPr/>
@@ -1883,7 +1901,7 @@
             <a:spLocks noGrp="1"/>
           </p:cNvSpPr>
           <p:nvPr>
-            <p:ph type="sldNum" idx="5" sz="quarter"/>
+            <p:ph type="sldNum" sz="quarter" idx="5"/>
           </p:nvPr>
         </p:nvSpPr>
         <p:spPr/>
@@ -1897,7 +1915,7 @@
 </file>
 
 <file path=ppt/notesSlides/notesSlide28.xml><?xml version="1.0" encoding="utf-8"?>
-<p:notes xmlns:a="http://schemas.openxmlformats.org/drawingml/2006/main" xmlns:p="http://schemas.openxmlformats.org/presentationml/2006/main" xmlns:r="http://schemas.openxmlformats.org/officeDocument/2006/relationships">
+<p:notes xmlns:a="http://schemas.openxmlformats.org/drawingml/2006/main" xmlns:r="http://schemas.openxmlformats.org/officeDocument/2006/relationships" xmlns:p="http://schemas.openxmlformats.org/presentationml/2006/main">
   <p:cSld>
     <p:spTree>
       <p:nvGrpSpPr>
@@ -1917,7 +1935,7 @@
         <p:nvSpPr>
           <p:cNvPr id="2" name="Slide Image Placeholder 1"/>
           <p:cNvSpPr>
-            <a:spLocks noGrp="1"/>
+            <a:spLocks noGrp="1" noRot="1" noChangeAspect="1"/>
           </p:cNvSpPr>
           <p:nvPr>
             <p:ph type="sldImg" idx="2"/>
@@ -1932,7 +1950,7 @@
             <a:spLocks noGrp="1"/>
           </p:cNvSpPr>
           <p:nvPr>
-            <p:ph type="body" idx="3" sz="quarter"/>
+            <p:ph type="body" sz="quarter" idx="3"/>
           </p:nvPr>
         </p:nvSpPr>
         <p:spPr/>
@@ -1953,7 +1971,7 @@
             <a:spLocks noGrp="1"/>
           </p:cNvSpPr>
           <p:nvPr>
-            <p:ph type="sldNum" idx="5" sz="quarter"/>
+            <p:ph type="sldNum" sz="quarter" idx="5"/>
           </p:nvPr>
         </p:nvSpPr>
         <p:spPr/>
@@ -1967,7 +1985,7 @@
 </file>
 
 <file path=ppt/notesSlides/notesSlide29.xml><?xml version="1.0" encoding="utf-8"?>
-<p:notes xmlns:a="http://schemas.openxmlformats.org/drawingml/2006/main" xmlns:p="http://schemas.openxmlformats.org/presentationml/2006/main" xmlns:r="http://schemas.openxmlformats.org/officeDocument/2006/relationships">
+<p:notes xmlns:a="http://schemas.openxmlformats.org/drawingml/2006/main" xmlns:r="http://schemas.openxmlformats.org/officeDocument/2006/relationships" xmlns:p="http://schemas.openxmlformats.org/presentationml/2006/main">
   <p:cSld>
     <p:spTree>
       <p:nvGrpSpPr>
@@ -1987,7 +2005,7 @@
         <p:nvSpPr>
           <p:cNvPr id="2" name="Slide Image Placeholder 1"/>
           <p:cNvSpPr>
-            <a:spLocks noGrp="1"/>
+            <a:spLocks noGrp="1" noRot="1" noChangeAspect="1"/>
           </p:cNvSpPr>
           <p:nvPr>
             <p:ph type="sldImg" idx="2"/>
@@ -2002,7 +2020,7 @@
             <a:spLocks noGrp="1"/>
           </p:cNvSpPr>
           <p:nvPr>
-            <p:ph type="body" idx="3" sz="quarter"/>
+            <p:ph type="body" sz="quarter" idx="3"/>
           </p:nvPr>
         </p:nvSpPr>
         <p:spPr/>
@@ -2023,7 +2041,7 @@
             <a:spLocks noGrp="1"/>
           </p:cNvSpPr>
           <p:nvPr>
-            <p:ph type="sldNum" idx="5" sz="quarter"/>
+            <p:ph type="sldNum" sz="quarter" idx="5"/>
           </p:nvPr>
         </p:nvSpPr>
         <p:spPr/>
@@ -2037,7 +2055,7 @@
 </file>
 
 <file path=ppt/notesSlides/notesSlide3.xml><?xml version="1.0" encoding="utf-8"?>
-<p:notes xmlns:a="http://schemas.openxmlformats.org/drawingml/2006/main" xmlns:p="http://schemas.openxmlformats.org/presentationml/2006/main" xmlns:r="http://schemas.openxmlformats.org/officeDocument/2006/relationships">
+<p:notes xmlns:a="http://schemas.openxmlformats.org/drawingml/2006/main" xmlns:r="http://schemas.openxmlformats.org/officeDocument/2006/relationships" xmlns:p="http://schemas.openxmlformats.org/presentationml/2006/main">
   <p:cSld>
     <p:spTree>
       <p:nvGrpSpPr>
@@ -2057,7 +2075,7 @@
         <p:nvSpPr>
           <p:cNvPr id="2" name="Slide Image Placeholder 1"/>
           <p:cNvSpPr>
-            <a:spLocks noGrp="1"/>
+            <a:spLocks noGrp="1" noRot="1" noChangeAspect="1"/>
           </p:cNvSpPr>
           <p:nvPr>
             <p:ph type="sldImg" idx="2"/>
@@ -2072,7 +2090,7 @@
             <a:spLocks noGrp="1"/>
           </p:cNvSpPr>
           <p:nvPr>
-            <p:ph type="body" idx="3" sz="quarter"/>
+            <p:ph type="body" sz="quarter" idx="3"/>
           </p:nvPr>
         </p:nvSpPr>
         <p:spPr/>
@@ -2093,7 +2111,7 @@
             <a:spLocks noGrp="1"/>
           </p:cNvSpPr>
           <p:nvPr>
-            <p:ph type="sldNum" idx="5" sz="quarter"/>
+            <p:ph type="sldNum" sz="quarter" idx="5"/>
           </p:nvPr>
         </p:nvSpPr>
         <p:spPr/>
@@ -2107,7 +2125,7 @@
 </file>
 
 <file path=ppt/notesSlides/notesSlide30.xml><?xml version="1.0" encoding="utf-8"?>
-<p:notes xmlns:a="http://schemas.openxmlformats.org/drawingml/2006/main" xmlns:p="http://schemas.openxmlformats.org/presentationml/2006/main" xmlns:r="http://schemas.openxmlformats.org/officeDocument/2006/relationships">
+<p:notes xmlns:a="http://schemas.openxmlformats.org/drawingml/2006/main" xmlns:r="http://schemas.openxmlformats.org/officeDocument/2006/relationships" xmlns:p="http://schemas.openxmlformats.org/presentationml/2006/main">
   <p:cSld>
     <p:spTree>
       <p:nvGrpSpPr>
@@ -2127,7 +2145,7 @@
         <p:nvSpPr>
           <p:cNvPr id="2" name="Slide Image Placeholder 1"/>
           <p:cNvSpPr>
-            <a:spLocks noGrp="1"/>
+            <a:spLocks noGrp="1" noRot="1" noChangeAspect="1"/>
           </p:cNvSpPr>
           <p:nvPr>
             <p:ph type="sldImg" idx="2"/>
@@ -2142,7 +2160,7 @@
             <a:spLocks noGrp="1"/>
           </p:cNvSpPr>
           <p:nvPr>
-            <p:ph type="body" idx="3" sz="quarter"/>
+            <p:ph type="body" sz="quarter" idx="3"/>
           </p:nvPr>
         </p:nvSpPr>
         <p:spPr/>
@@ -2163,7 +2181,7 @@
             <a:spLocks noGrp="1"/>
           </p:cNvSpPr>
           <p:nvPr>
-            <p:ph type="sldNum" idx="5" sz="quarter"/>
+            <p:ph type="sldNum" sz="quarter" idx="5"/>
           </p:nvPr>
         </p:nvSpPr>
         <p:spPr/>
@@ -2177,7 +2195,7 @@
 </file>
 
 <file path=ppt/notesSlides/notesSlide4.xml><?xml version="1.0" encoding="utf-8"?>
-<p:notes xmlns:a="http://schemas.openxmlformats.org/drawingml/2006/main" xmlns:p="http://schemas.openxmlformats.org/presentationml/2006/main" xmlns:r="http://schemas.openxmlformats.org/officeDocument/2006/relationships">
+<p:notes xmlns:a="http://schemas.openxmlformats.org/drawingml/2006/main" xmlns:r="http://schemas.openxmlformats.org/officeDocument/2006/relationships" xmlns:p="http://schemas.openxmlformats.org/presentationml/2006/main">
   <p:cSld>
     <p:spTree>
       <p:nvGrpSpPr>
@@ -2197,7 +2215,7 @@
         <p:nvSpPr>
           <p:cNvPr id="2" name="Slide Image Placeholder 1"/>
           <p:cNvSpPr>
-            <a:spLocks noGrp="1"/>
+            <a:spLocks noGrp="1" noRot="1" noChangeAspect="1"/>
           </p:cNvSpPr>
           <p:nvPr>
             <p:ph type="sldImg" idx="2"/>
@@ -2212,7 +2230,7 @@
             <a:spLocks noGrp="1"/>
           </p:cNvSpPr>
           <p:nvPr>
-            <p:ph type="body" idx="3" sz="quarter"/>
+            <p:ph type="body" sz="quarter" idx="3"/>
           </p:nvPr>
         </p:nvSpPr>
         <p:spPr/>
@@ -2233,7 +2251,7 @@
             <a:spLocks noGrp="1"/>
           </p:cNvSpPr>
           <p:nvPr>
-            <p:ph type="sldNum" idx="5" sz="quarter"/>
+            <p:ph type="sldNum" sz="quarter" idx="5"/>
           </p:nvPr>
         </p:nvSpPr>
         <p:spPr/>
@@ -2247,7 +2265,7 @@
 </file>
 
 <file path=ppt/notesSlides/notesSlide5.xml><?xml version="1.0" encoding="utf-8"?>
-<p:notes xmlns:a="http://schemas.openxmlformats.org/drawingml/2006/main" xmlns:p="http://schemas.openxmlformats.org/presentationml/2006/main" xmlns:r="http://schemas.openxmlformats.org/officeDocument/2006/relationships">
+<p:notes xmlns:a="http://schemas.openxmlformats.org/drawingml/2006/main" xmlns:r="http://schemas.openxmlformats.org/officeDocument/2006/relationships" xmlns:p="http://schemas.openxmlformats.org/presentationml/2006/main">
   <p:cSld>
     <p:spTree>
       <p:nvGrpSpPr>
@@ -2267,7 +2285,7 @@
         <p:nvSpPr>
           <p:cNvPr id="2" name="Slide Image Placeholder 1"/>
           <p:cNvSpPr>
-            <a:spLocks noGrp="1"/>
+            <a:spLocks noGrp="1" noRot="1" noChangeAspect="1"/>
           </p:cNvSpPr>
           <p:nvPr>
             <p:ph type="sldImg" idx="2"/>
@@ -2282,7 +2300,7 @@
             <a:spLocks noGrp="1"/>
           </p:cNvSpPr>
           <p:nvPr>
-            <p:ph type="body" idx="3" sz="quarter"/>
+            <p:ph type="body" sz="quarter" idx="3"/>
           </p:nvPr>
         </p:nvSpPr>
         <p:spPr/>
@@ -2303,7 +2321,7 @@
             <a:spLocks noGrp="1"/>
           </p:cNvSpPr>
           <p:nvPr>
-            <p:ph type="sldNum" idx="5" sz="quarter"/>
+            <p:ph type="sldNum" sz="quarter" idx="5"/>
           </p:nvPr>
         </p:nvSpPr>
         <p:spPr/>
@@ -2317,7 +2335,7 @@
 </file>
 
 <file path=ppt/notesSlides/notesSlide6.xml><?xml version="1.0" encoding="utf-8"?>
-<p:notes xmlns:a="http://schemas.openxmlformats.org/drawingml/2006/main" xmlns:p="http://schemas.openxmlformats.org/presentationml/2006/main" xmlns:r="http://schemas.openxmlformats.org/officeDocument/2006/relationships">
+<p:notes xmlns:a="http://schemas.openxmlformats.org/drawingml/2006/main" xmlns:r="http://schemas.openxmlformats.org/officeDocument/2006/relationships" xmlns:p="http://schemas.openxmlformats.org/presentationml/2006/main">
   <p:cSld>
     <p:spTree>
       <p:nvGrpSpPr>
@@ -2337,7 +2355,7 @@
         <p:nvSpPr>
           <p:cNvPr id="2" name="Slide Image Placeholder 1"/>
           <p:cNvSpPr>
-            <a:spLocks noGrp="1"/>
+            <a:spLocks noGrp="1" noRot="1" noChangeAspect="1"/>
           </p:cNvSpPr>
           <p:nvPr>
             <p:ph type="sldImg" idx="2"/>
@@ -2352,7 +2370,7 @@
             <a:spLocks noGrp="1"/>
           </p:cNvSpPr>
           <p:nvPr>
-            <p:ph type="body" idx="3" sz="quarter"/>
+            <p:ph type="body" sz="quarter" idx="3"/>
           </p:nvPr>
         </p:nvSpPr>
         <p:spPr/>
@@ -2373,7 +2391,7 @@
             <a:spLocks noGrp="1"/>
           </p:cNvSpPr>
           <p:nvPr>
-            <p:ph type="sldNum" idx="5" sz="quarter"/>
+            <p:ph type="sldNum" sz="quarter" idx="5"/>
           </p:nvPr>
         </p:nvSpPr>
         <p:spPr/>
@@ -2387,7 +2405,7 @@
 </file>
 
 <file path=ppt/notesSlides/notesSlide7.xml><?xml version="1.0" encoding="utf-8"?>
-<p:notes xmlns:a="http://schemas.openxmlformats.org/drawingml/2006/main" xmlns:p="http://schemas.openxmlformats.org/presentationml/2006/main" xmlns:r="http://schemas.openxmlformats.org/officeDocument/2006/relationships">
+<p:notes xmlns:a="http://schemas.openxmlformats.org/drawingml/2006/main" xmlns:r="http://schemas.openxmlformats.org/officeDocument/2006/relationships" xmlns:p="http://schemas.openxmlformats.org/presentationml/2006/main">
   <p:cSld>
     <p:spTree>
       <p:nvGrpSpPr>
@@ -2407,7 +2425,7 @@
         <p:nvSpPr>
           <p:cNvPr id="2" name="Slide Image Placeholder 1"/>
           <p:cNvSpPr>
-            <a:spLocks noGrp="1"/>
+            <a:spLocks noGrp="1" noRot="1" noChangeAspect="1"/>
           </p:cNvSpPr>
           <p:nvPr>
             <p:ph type="sldImg" idx="2"/>
@@ -2422,7 +2440,7 @@
             <a:spLocks noGrp="1"/>
           </p:cNvSpPr>
           <p:nvPr>
-            <p:ph type="body" idx="3" sz="quarter"/>
+            <p:ph type="body" sz="quarter" idx="3"/>
           </p:nvPr>
         </p:nvSpPr>
         <p:spPr/>
@@ -2443,7 +2461,7 @@
             <a:spLocks noGrp="1"/>
           </p:cNvSpPr>
           <p:nvPr>
-            <p:ph type="sldNum" idx="5" sz="quarter"/>
+            <p:ph type="sldNum" sz="quarter" idx="5"/>
           </p:nvPr>
         </p:nvSpPr>
         <p:spPr/>
@@ -2457,7 +2475,7 @@
 </file>
 
 <file path=ppt/notesSlides/notesSlide8.xml><?xml version="1.0" encoding="utf-8"?>
-<p:notes xmlns:a="http://schemas.openxmlformats.org/drawingml/2006/main" xmlns:p="http://schemas.openxmlformats.org/presentationml/2006/main" xmlns:r="http://schemas.openxmlformats.org/officeDocument/2006/relationships">
+<p:notes xmlns:a="http://schemas.openxmlformats.org/drawingml/2006/main" xmlns:r="http://schemas.openxmlformats.org/officeDocument/2006/relationships" xmlns:p="http://schemas.openxmlformats.org/presentationml/2006/main">
   <p:cSld>
     <p:spTree>
       <p:nvGrpSpPr>
@@ -2477,7 +2495,7 @@
         <p:nvSpPr>
           <p:cNvPr id="2" name="Slide Image Placeholder 1"/>
           <p:cNvSpPr>
-            <a:spLocks noGrp="1"/>
+            <a:spLocks noGrp="1" noRot="1" noChangeAspect="1"/>
           </p:cNvSpPr>
           <p:nvPr>
             <p:ph type="sldImg" idx="2"/>
@@ -2492,7 +2510,7 @@
             <a:spLocks noGrp="1"/>
           </p:cNvSpPr>
           <p:nvPr>
-            <p:ph type="body" idx="3" sz="quarter"/>
+            <p:ph type="body" sz="quarter" idx="3"/>
           </p:nvPr>
         </p:nvSpPr>
         <p:spPr/>
@@ -2513,7 +2531,7 @@
             <a:spLocks noGrp="1"/>
           </p:cNvSpPr>
           <p:nvPr>
-            <p:ph type="sldNum" idx="5" sz="quarter"/>
+            <p:ph type="sldNum" sz="quarter" idx="5"/>
           </p:nvPr>
         </p:nvSpPr>
         <p:spPr/>
@@ -2527,7 +2545,7 @@
 </file>
 
 <file path=ppt/notesSlides/notesSlide9.xml><?xml version="1.0" encoding="utf-8"?>
-<p:notes xmlns:a="http://schemas.openxmlformats.org/drawingml/2006/main" xmlns:p="http://schemas.openxmlformats.org/presentationml/2006/main" xmlns:r="http://schemas.openxmlformats.org/officeDocument/2006/relationships">
+<p:notes xmlns:a="http://schemas.openxmlformats.org/drawingml/2006/main" xmlns:r="http://schemas.openxmlformats.org/officeDocument/2006/relationships" xmlns:p="http://schemas.openxmlformats.org/presentationml/2006/main">
   <p:cSld>
     <p:spTree>
       <p:nvGrpSpPr>
@@ -2547,7 +2565,7 @@
         <p:nvSpPr>
           <p:cNvPr id="2" name="Slide Image Placeholder 1"/>
           <p:cNvSpPr>
-            <a:spLocks noGrp="1"/>
+            <a:spLocks noGrp="1" noRot="1" noChangeAspect="1"/>
           </p:cNvSpPr>
           <p:nvPr>
             <p:ph type="sldImg" idx="2"/>
@@ -2562,7 +2580,7 @@
             <a:spLocks noGrp="1"/>
           </p:cNvSpPr>
           <p:nvPr>
-            <p:ph type="body" idx="3" sz="quarter"/>
+            <p:ph type="body" sz="quarter" idx="3"/>
           </p:nvPr>
         </p:nvSpPr>
         <p:spPr/>
@@ -2583,7 +2601,7 @@
             <a:spLocks noGrp="1"/>
           </p:cNvSpPr>
           <p:nvPr>
-            <p:ph type="sldNum" idx="5" sz="quarter"/>
+            <p:ph type="sldNum" sz="quarter" idx="5"/>
           </p:nvPr>
         </p:nvSpPr>
         <p:spPr/>
@@ -2634,10 +2652,9 @@
           <a:lstStyle/>
           <a:p>
             <a:r>
-              <a:rPr lang="en-US" smtClean="0"/>
+              <a:rPr lang="en-US"/>
               <a:t>Click to edit Master title style</a:t>
             </a:r>
-            <a:endParaRPr lang="en-US"/>
           </a:p>
         </p:txBody>
       </p:sp>
@@ -2753,10 +2770,9 @@
           </a:lstStyle>
           <a:p>
             <a:r>
-              <a:rPr lang="en-US" smtClean="0"/>
+              <a:rPr lang="en-US"/>
               <a:t>Click to edit Master subtitle style</a:t>
             </a:r>
-            <a:endParaRPr lang="en-US"/>
           </a:p>
         </p:txBody>
       </p:sp>
@@ -2777,7 +2793,7 @@
           <a:p>
             <a:fld id="{5BCAD085-E8A6-8845-BD4E-CB4CCA059FC4}" type="datetimeFigureOut">
               <a:rPr lang="en-US" smtClean="0"/>
-              <a:t>1/27/13</a:t>
+              <a:t>10/29/2026</a:t>
             </a:fld>
             <a:endParaRPr lang="en-US"/>
           </a:p>
@@ -2871,10 +2887,9 @@
           <a:lstStyle/>
           <a:p>
             <a:r>
-              <a:rPr lang="en-US" smtClean="0"/>
+              <a:rPr lang="en-US"/>
               <a:t>Click to edit Master title style</a:t>
             </a:r>
-            <a:endParaRPr lang="en-US"/>
           </a:p>
         </p:txBody>
       </p:sp>
@@ -2895,38 +2910,37 @@
           <a:p>
             <a:pPr lvl="0"/>
             <a:r>
-              <a:rPr lang="en-US" smtClean="0"/>
+              <a:rPr lang="en-US"/>
               <a:t>Click to edit Master text styles</a:t>
             </a:r>
           </a:p>
           <a:p>
             <a:pPr lvl="1"/>
             <a:r>
-              <a:rPr lang="en-US" smtClean="0"/>
+              <a:rPr lang="en-US"/>
               <a:t>Second level</a:t>
             </a:r>
           </a:p>
           <a:p>
             <a:pPr lvl="2"/>
             <a:r>
-              <a:rPr lang="en-US" smtClean="0"/>
+              <a:rPr lang="en-US"/>
               <a:t>Third level</a:t>
             </a:r>
           </a:p>
           <a:p>
             <a:pPr lvl="3"/>
             <a:r>
-              <a:rPr lang="en-US" smtClean="0"/>
+              <a:rPr lang="en-US"/>
               <a:t>Fourth level</a:t>
             </a:r>
           </a:p>
           <a:p>
             <a:pPr lvl="4"/>
             <a:r>
-              <a:rPr lang="en-US" smtClean="0"/>
+              <a:rPr lang="en-US"/>
               <a:t>Fifth level</a:t>
             </a:r>
-            <a:endParaRPr lang="en-US"/>
           </a:p>
         </p:txBody>
       </p:sp>
@@ -2947,7 +2961,7 @@
           <a:p>
             <a:fld id="{5BCAD085-E8A6-8845-BD4E-CB4CCA059FC4}" type="datetimeFigureOut">
               <a:rPr lang="en-US" smtClean="0"/>
-              <a:t>1/27/13</a:t>
+              <a:t>10/29/2026</a:t>
             </a:fld>
             <a:endParaRPr lang="en-US"/>
           </a:p>
@@ -3046,10 +3060,9 @@
           <a:lstStyle/>
           <a:p>
             <a:r>
-              <a:rPr lang="en-US" smtClean="0"/>
+              <a:rPr lang="en-US"/>
               <a:t>Click to edit Master title style</a:t>
             </a:r>
-            <a:endParaRPr lang="en-US"/>
           </a:p>
         </p:txBody>
       </p:sp>
@@ -3075,38 +3088,37 @@
           <a:p>
             <a:pPr lvl="0"/>
             <a:r>
-              <a:rPr lang="en-US" smtClean="0"/>
+              <a:rPr lang="en-US"/>
               <a:t>Click to edit Master text styles</a:t>
             </a:r>
           </a:p>
           <a:p>
             <a:pPr lvl="1"/>
             <a:r>
-              <a:rPr lang="en-US" smtClean="0"/>
+              <a:rPr lang="en-US"/>
               <a:t>Second level</a:t>
             </a:r>
           </a:p>
           <a:p>
             <a:pPr lvl="2"/>
             <a:r>
-              <a:rPr lang="en-US" smtClean="0"/>
+              <a:rPr lang="en-US"/>
               <a:t>Third level</a:t>
             </a:r>
           </a:p>
           <a:p>
             <a:pPr lvl="3"/>
             <a:r>
-              <a:rPr lang="en-US" smtClean="0"/>
+              <a:rPr lang="en-US"/>
               <a:t>Fourth level</a:t>
             </a:r>
           </a:p>
           <a:p>
             <a:pPr lvl="4"/>
             <a:r>
-              <a:rPr lang="en-US" smtClean="0"/>
+              <a:rPr lang="en-US"/>
               <a:t>Fifth level</a:t>
             </a:r>
-            <a:endParaRPr lang="en-US"/>
           </a:p>
         </p:txBody>
       </p:sp>
@@ -3127,7 +3139,7 @@
           <a:p>
             <a:fld id="{5BCAD085-E8A6-8845-BD4E-CB4CCA059FC4}" type="datetimeFigureOut">
               <a:rPr lang="en-US" smtClean="0"/>
-              <a:t>1/27/13</a:t>
+              <a:t>10/29/2026</a:t>
             </a:fld>
             <a:endParaRPr lang="en-US"/>
           </a:p>
@@ -3221,10 +3233,9 @@
           <a:lstStyle/>
           <a:p>
             <a:r>
-              <a:rPr lang="en-US" smtClean="0"/>
+              <a:rPr lang="en-US"/>
               <a:t>Click to edit Master title style</a:t>
             </a:r>
-            <a:endParaRPr lang="en-US"/>
           </a:p>
         </p:txBody>
       </p:sp>
@@ -3245,38 +3256,37 @@
           <a:p>
             <a:pPr lvl="0"/>
             <a:r>
-              <a:rPr lang="en-US" smtClean="0"/>
+              <a:rPr lang="en-US"/>
               <a:t>Click to edit Master text styles</a:t>
             </a:r>
           </a:p>
           <a:p>
             <a:pPr lvl="1"/>
             <a:r>
-              <a:rPr lang="en-US" smtClean="0"/>
+              <a:rPr lang="en-US"/>
               <a:t>Second level</a:t>
             </a:r>
           </a:p>
           <a:p>
             <a:pPr lvl="2"/>
             <a:r>
-              <a:rPr lang="en-US" smtClean="0"/>
+              <a:rPr lang="en-US"/>
               <a:t>Third level</a:t>
             </a:r>
           </a:p>
           <a:p>
             <a:pPr lvl="3"/>
             <a:r>
-              <a:rPr lang="en-US" smtClean="0"/>
+              <a:rPr lang="en-US"/>
               <a:t>Fourth level</a:t>
             </a:r>
           </a:p>
           <a:p>
             <a:pPr lvl="4"/>
             <a:r>
-              <a:rPr lang="en-US" smtClean="0"/>
+              <a:rPr lang="en-US"/>
               <a:t>Fifth level</a:t>
             </a:r>
-            <a:endParaRPr lang="en-US"/>
           </a:p>
         </p:txBody>
       </p:sp>
@@ -3297,7 +3307,7 @@
           <a:p>
             <a:fld id="{5BCAD085-E8A6-8845-BD4E-CB4CCA059FC4}" type="datetimeFigureOut">
               <a:rPr lang="en-US" smtClean="0"/>
-              <a:t>1/27/13</a:t>
+              <a:t>10/29/2026</a:t>
             </a:fld>
             <a:endParaRPr lang="en-US"/>
           </a:p>
@@ -3400,10 +3410,9 @@
           </a:lstStyle>
           <a:p>
             <a:r>
-              <a:rPr lang="en-US" smtClean="0"/>
+              <a:rPr lang="en-US"/>
               <a:t>Click to edit Master title style</a:t>
             </a:r>
-            <a:endParaRPr lang="en-US"/>
           </a:p>
         </p:txBody>
       </p:sp>
@@ -3520,7 +3529,7 @@
           <a:p>
             <a:pPr lvl="0"/>
             <a:r>
-              <a:rPr lang="en-US" smtClean="0"/>
+              <a:rPr lang="en-US"/>
               <a:t>Click to edit Master text styles</a:t>
             </a:r>
           </a:p>
@@ -3543,7 +3552,7 @@
           <a:p>
             <a:fld id="{5BCAD085-E8A6-8845-BD4E-CB4CCA059FC4}" type="datetimeFigureOut">
               <a:rPr lang="en-US" smtClean="0"/>
-              <a:t>1/27/13</a:t>
+              <a:t>10/29/2026</a:t>
             </a:fld>
             <a:endParaRPr lang="en-US"/>
           </a:p>
@@ -3637,10 +3646,9 @@
           <a:lstStyle/>
           <a:p>
             <a:r>
-              <a:rPr lang="en-US" smtClean="0"/>
+              <a:rPr lang="en-US"/>
               <a:t>Click to edit Master title style</a:t>
             </a:r>
-            <a:endParaRPr lang="en-US"/>
           </a:p>
         </p:txBody>
       </p:sp>
@@ -3694,38 +3702,37 @@
           <a:p>
             <a:pPr lvl="0"/>
             <a:r>
-              <a:rPr lang="en-US" smtClean="0"/>
+              <a:rPr lang="en-US"/>
               <a:t>Click to edit Master text styles</a:t>
             </a:r>
           </a:p>
           <a:p>
             <a:pPr lvl="1"/>
             <a:r>
-              <a:rPr lang="en-US" smtClean="0"/>
+              <a:rPr lang="en-US"/>
               <a:t>Second level</a:t>
             </a:r>
           </a:p>
           <a:p>
             <a:pPr lvl="2"/>
             <a:r>
-              <a:rPr lang="en-US" smtClean="0"/>
+              <a:rPr lang="en-US"/>
               <a:t>Third level</a:t>
             </a:r>
           </a:p>
           <a:p>
             <a:pPr lvl="3"/>
             <a:r>
-              <a:rPr lang="en-US" smtClean="0"/>
+              <a:rPr lang="en-US"/>
               <a:t>Fourth level</a:t>
             </a:r>
           </a:p>
           <a:p>
             <a:pPr lvl="4"/>
             <a:r>
-              <a:rPr lang="en-US" smtClean="0"/>
+              <a:rPr lang="en-US"/>
               <a:t>Fifth level</a:t>
             </a:r>
-            <a:endParaRPr lang="en-US"/>
           </a:p>
         </p:txBody>
       </p:sp>
@@ -3779,38 +3786,37 @@
           <a:p>
             <a:pPr lvl="0"/>
             <a:r>
-              <a:rPr lang="en-US" smtClean="0"/>
+              <a:rPr lang="en-US"/>
               <a:t>Click to edit Master text styles</a:t>
             </a:r>
           </a:p>
           <a:p>
             <a:pPr lvl="1"/>
             <a:r>
-              <a:rPr lang="en-US" smtClean="0"/>
+              <a:rPr lang="en-US"/>
               <a:t>Second level</a:t>
             </a:r>
           </a:p>
           <a:p>
             <a:pPr lvl="2"/>
             <a:r>
-              <a:rPr lang="en-US" smtClean="0"/>
+              <a:rPr lang="en-US"/>
               <a:t>Third level</a:t>
             </a:r>
           </a:p>
           <a:p>
             <a:pPr lvl="3"/>
             <a:r>
-              <a:rPr lang="en-US" smtClean="0"/>
+              <a:rPr lang="en-US"/>
               <a:t>Fourth level</a:t>
             </a:r>
           </a:p>
           <a:p>
             <a:pPr lvl="4"/>
             <a:r>
-              <a:rPr lang="en-US" smtClean="0"/>
+              <a:rPr lang="en-US"/>
               <a:t>Fifth level</a:t>
             </a:r>
-            <a:endParaRPr lang="en-US"/>
           </a:p>
         </p:txBody>
       </p:sp>
@@ -3831,7 +3837,7 @@
           <a:p>
             <a:fld id="{5BCAD085-E8A6-8845-BD4E-CB4CCA059FC4}" type="datetimeFigureOut">
               <a:rPr lang="en-US" smtClean="0"/>
-              <a:t>1/27/13</a:t>
+              <a:t>10/29/2026</a:t>
             </a:fld>
             <a:endParaRPr lang="en-US"/>
           </a:p>
@@ -3929,10 +3935,9 @@
           </a:lstStyle>
           <a:p>
             <a:r>
-              <a:rPr lang="en-US" smtClean="0"/>
+              <a:rPr lang="en-US"/>
               <a:t>Click to edit Master title style</a:t>
             </a:r>
-            <a:endParaRPr lang="en-US"/>
           </a:p>
         </p:txBody>
       </p:sp>
@@ -3995,7 +4000,7 @@
           <a:p>
             <a:pPr lvl="0"/>
             <a:r>
-              <a:rPr lang="en-US" smtClean="0"/>
+              <a:rPr lang="en-US"/>
               <a:t>Click to edit Master text styles</a:t>
             </a:r>
           </a:p>
@@ -4051,38 +4056,37 @@
           <a:p>
             <a:pPr lvl="0"/>
             <a:r>
-              <a:rPr lang="en-US" smtClean="0"/>
+              <a:rPr lang="en-US"/>
               <a:t>Click to edit Master text styles</a:t>
             </a:r>
           </a:p>
           <a:p>
             <a:pPr lvl="1"/>
             <a:r>
-              <a:rPr lang="en-US" smtClean="0"/>
+              <a:rPr lang="en-US"/>
               <a:t>Second level</a:t>
             </a:r>
           </a:p>
           <a:p>
             <a:pPr lvl="2"/>
             <a:r>
-              <a:rPr lang="en-US" smtClean="0"/>
+              <a:rPr lang="en-US"/>
               <a:t>Third level</a:t>
             </a:r>
           </a:p>
           <a:p>
             <a:pPr lvl="3"/>
             <a:r>
-              <a:rPr lang="en-US" smtClean="0"/>
+              <a:rPr lang="en-US"/>
               <a:t>Fourth level</a:t>
             </a:r>
           </a:p>
           <a:p>
             <a:pPr lvl="4"/>
             <a:r>
-              <a:rPr lang="en-US" smtClean="0"/>
+              <a:rPr lang="en-US"/>
               <a:t>Fifth level</a:t>
             </a:r>
-            <a:endParaRPr lang="en-US"/>
           </a:p>
         </p:txBody>
       </p:sp>
@@ -4145,7 +4149,7 @@
           <a:p>
             <a:pPr lvl="0"/>
             <a:r>
-              <a:rPr lang="en-US" smtClean="0"/>
+              <a:rPr lang="en-US"/>
               <a:t>Click to edit Master text styles</a:t>
             </a:r>
           </a:p>
@@ -4201,38 +4205,37 @@
           <a:p>
             <a:pPr lvl="0"/>
             <a:r>
-              <a:rPr lang="en-US" smtClean="0"/>
+              <a:rPr lang="en-US"/>
               <a:t>Click to edit Master text styles</a:t>
             </a:r>
           </a:p>
           <a:p>
             <a:pPr lvl="1"/>
             <a:r>
-              <a:rPr lang="en-US" smtClean="0"/>
+              <a:rPr lang="en-US"/>
               <a:t>Second level</a:t>
             </a:r>
           </a:p>
           <a:p>
             <a:pPr lvl="2"/>
             <a:r>
-              <a:rPr lang="en-US" smtClean="0"/>
+              <a:rPr lang="en-US"/>
               <a:t>Third level</a:t>
             </a:r>
           </a:p>
           <a:p>
             <a:pPr lvl="3"/>
             <a:r>
-              <a:rPr lang="en-US" smtClean="0"/>
+              <a:rPr lang="en-US"/>
               <a:t>Fourth level</a:t>
             </a:r>
           </a:p>
           <a:p>
             <a:pPr lvl="4"/>
             <a:r>
-              <a:rPr lang="en-US" smtClean="0"/>
+              <a:rPr lang="en-US"/>
               <a:t>Fifth level</a:t>
             </a:r>
-            <a:endParaRPr lang="en-US"/>
           </a:p>
         </p:txBody>
       </p:sp>
@@ -4253,7 +4256,7 @@
           <a:p>
             <a:fld id="{5BCAD085-E8A6-8845-BD4E-CB4CCA059FC4}" type="datetimeFigureOut">
               <a:rPr lang="en-US" smtClean="0"/>
-              <a:t>1/27/13</a:t>
+              <a:t>10/29/2026</a:t>
             </a:fld>
             <a:endParaRPr lang="en-US"/>
           </a:p>
@@ -4347,10 +4350,9 @@
           <a:lstStyle/>
           <a:p>
             <a:r>
-              <a:rPr lang="en-US" smtClean="0"/>
+              <a:rPr lang="en-US"/>
               <a:t>Click to edit Master title style</a:t>
             </a:r>
-            <a:endParaRPr lang="en-US"/>
           </a:p>
         </p:txBody>
       </p:sp>
@@ -4371,7 +4373,7 @@
           <a:p>
             <a:fld id="{5BCAD085-E8A6-8845-BD4E-CB4CCA059FC4}" type="datetimeFigureOut">
               <a:rPr lang="en-US" smtClean="0"/>
-              <a:t>1/27/13</a:t>
+              <a:t>10/29/2026</a:t>
             </a:fld>
             <a:endParaRPr lang="en-US"/>
           </a:p>
@@ -4466,7 +4468,7 @@
           <a:p>
             <a:fld id="{5BCAD085-E8A6-8845-BD4E-CB4CCA059FC4}" type="datetimeFigureOut">
               <a:rPr lang="en-US" smtClean="0"/>
-              <a:t>1/27/13</a:t>
+              <a:t>10/29/2026</a:t>
             </a:fld>
             <a:endParaRPr lang="en-US"/>
           </a:p>
@@ -4569,10 +4571,9 @@
           </a:lstStyle>
           <a:p>
             <a:r>
-              <a:rPr lang="en-US" smtClean="0"/>
+              <a:rPr lang="en-US"/>
               <a:t>Click to edit Master title style</a:t>
             </a:r>
-            <a:endParaRPr lang="en-US"/>
           </a:p>
         </p:txBody>
       </p:sp>
@@ -4626,38 +4627,37 @@
           <a:p>
             <a:pPr lvl="0"/>
             <a:r>
-              <a:rPr lang="en-US" smtClean="0"/>
+              <a:rPr lang="en-US"/>
               <a:t>Click to edit Master text styles</a:t>
             </a:r>
           </a:p>
           <a:p>
             <a:pPr lvl="1"/>
             <a:r>
-              <a:rPr lang="en-US" smtClean="0"/>
+              <a:rPr lang="en-US"/>
               <a:t>Second level</a:t>
             </a:r>
           </a:p>
           <a:p>
             <a:pPr lvl="2"/>
             <a:r>
-              <a:rPr lang="en-US" smtClean="0"/>
+              <a:rPr lang="en-US"/>
               <a:t>Third level</a:t>
             </a:r>
           </a:p>
           <a:p>
             <a:pPr lvl="3"/>
             <a:r>
-              <a:rPr lang="en-US" smtClean="0"/>
+              <a:rPr lang="en-US"/>
               <a:t>Fourth level</a:t>
             </a:r>
           </a:p>
           <a:p>
             <a:pPr lvl="4"/>
             <a:r>
-              <a:rPr lang="en-US" smtClean="0"/>
+              <a:rPr lang="en-US"/>
               <a:t>Fifth level</a:t>
             </a:r>
-            <a:endParaRPr lang="en-US"/>
           </a:p>
         </p:txBody>
       </p:sp>
@@ -4720,7 +4720,7 @@
           <a:p>
             <a:pPr lvl="0"/>
             <a:r>
-              <a:rPr lang="en-US" smtClean="0"/>
+              <a:rPr lang="en-US"/>
               <a:t>Click to edit Master text styles</a:t>
             </a:r>
           </a:p>
@@ -4743,7 +4743,7 @@
           <a:p>
             <a:fld id="{5BCAD085-E8A6-8845-BD4E-CB4CCA059FC4}" type="datetimeFigureOut">
               <a:rPr lang="en-US" smtClean="0"/>
-              <a:t>1/27/13</a:t>
+              <a:t>10/29/2026</a:t>
             </a:fld>
             <a:endParaRPr lang="en-US"/>
           </a:p>
@@ -4846,10 +4846,9 @@
           </a:lstStyle>
           <a:p>
             <a:r>
-              <a:rPr lang="en-US" smtClean="0"/>
+              <a:rPr lang="en-US"/>
               <a:t>Click to edit Master title style</a:t>
             </a:r>
-            <a:endParaRPr lang="en-US"/>
           </a:p>
         </p:txBody>
       </p:sp>
@@ -4973,7 +4972,7 @@
           <a:p>
             <a:pPr lvl="0"/>
             <a:r>
-              <a:rPr lang="en-US" smtClean="0"/>
+              <a:rPr lang="en-US"/>
               <a:t>Click to edit Master text styles</a:t>
             </a:r>
           </a:p>
@@ -4996,7 +4995,7 @@
           <a:p>
             <a:fld id="{5BCAD085-E8A6-8845-BD4E-CB4CCA059FC4}" type="datetimeFigureOut">
               <a:rPr lang="en-US" smtClean="0"/>
-              <a:t>1/27/13</a:t>
+              <a:t>10/29/2026</a:t>
             </a:fld>
             <a:endParaRPr lang="en-US"/>
           </a:p>
@@ -5105,10 +5104,9 @@
           <a:lstStyle/>
           <a:p>
             <a:r>
-              <a:rPr lang="en-US" smtClean="0"/>
+              <a:rPr lang="en-US"/>
               <a:t>Click to edit Master title style</a:t>
             </a:r>
-            <a:endParaRPr lang="en-US"/>
           </a:p>
         </p:txBody>
       </p:sp>
@@ -5139,38 +5137,37 @@
           <a:p>
             <a:pPr lvl="0"/>
             <a:r>
-              <a:rPr lang="en-US" smtClean="0"/>
+              <a:rPr lang="en-US"/>
               <a:t>Click to edit Master text styles</a:t>
             </a:r>
           </a:p>
           <a:p>
             <a:pPr lvl="1"/>
             <a:r>
-              <a:rPr lang="en-US" smtClean="0"/>
+              <a:rPr lang="en-US"/>
               <a:t>Second level</a:t>
             </a:r>
           </a:p>
           <a:p>
             <a:pPr lvl="2"/>
             <a:r>
-              <a:rPr lang="en-US" smtClean="0"/>
+              <a:rPr lang="en-US"/>
               <a:t>Third level</a:t>
             </a:r>
           </a:p>
           <a:p>
             <a:pPr lvl="3"/>
             <a:r>
-              <a:rPr lang="en-US" smtClean="0"/>
+              <a:rPr lang="en-US"/>
               <a:t>Fourth level</a:t>
             </a:r>
           </a:p>
           <a:p>
             <a:pPr lvl="4"/>
             <a:r>
-              <a:rPr lang="en-US" smtClean="0"/>
+              <a:rPr lang="en-US"/>
               <a:t>Fifth level</a:t>
             </a:r>
-            <a:endParaRPr lang="en-US"/>
           </a:p>
         </p:txBody>
       </p:sp>
@@ -5209,7 +5206,7 @@
           <a:p>
             <a:fld id="{5BCAD085-E8A6-8845-BD4E-CB4CCA059FC4}" type="datetimeFigureOut">
               <a:rPr lang="en-US" smtClean="0"/>
-              <a:t>1/27/13</a:t>
+              <a:t>10/29/2026</a:t>
             </a:fld>
             <a:endParaRPr lang="en-US"/>
           </a:p>
@@ -5568,7 +5565,7 @@
 </file>
 
 <file path=ppt/slides/slide1.xml><?xml version="1.0" encoding="utf-8"?>
-<p:sld xmlns:a="http://schemas.openxmlformats.org/drawingml/2006/main" xmlns:p="http://schemas.openxmlformats.org/presentationml/2006/main" xmlns:r="http://schemas.openxmlformats.org/officeDocument/2006/relationships">
+<p:sld xmlns:a="http://schemas.openxmlformats.org/drawingml/2006/main" xmlns:r="http://schemas.openxmlformats.org/officeDocument/2006/relationships" xmlns:p="http://schemas.openxmlformats.org/presentationml/2006/main">
   <p:cSld>
     <p:spTree>
       <p:nvGrpSpPr>
@@ -5576,7 +5573,14 @@
         <p:cNvGrpSpPr/>
         <p:nvPr/>
       </p:nvGrpSpPr>
-      <p:grpSpPr/>
+      <p:grpSpPr>
+        <a:xfrm>
+          <a:off x="0" y="0"/>
+          <a:ext cx="0" cy="0"/>
+          <a:chOff x="0" y="0"/>
+          <a:chExt cx="0" cy="0"/>
+        </a:xfrm>
+      </p:grpSpPr>
       <p:sp>
         <p:nvSpPr>
           <p:cNvPr id="2" name="Rectangle 1"/>
@@ -5618,6 +5622,7 @@
           <a:lstStyle/>
           <a:p>
             <a:pPr algn="ctr"/>
+            <a:endParaRPr/>
           </a:p>
         </p:txBody>
       </p:sp>
@@ -5662,6 +5667,7 @@
           <a:lstStyle/>
           <a:p>
             <a:pPr algn="ctr"/>
+            <a:endParaRPr/>
           </a:p>
         </p:txBody>
       </p:sp>
@@ -5706,6 +5712,7 @@
           <a:lstStyle/>
           <a:p>
             <a:pPr algn="ctr"/>
+            <a:endParaRPr/>
           </a:p>
         </p:txBody>
       </p:sp>
@@ -5757,7 +5764,7 @@
         <p:spPr>
           <a:xfrm>
             <a:off x="731520" y="2377440"/>
-            <a:ext cx="10698480" cy="1554480"/>
+            <a:ext cx="10698480" cy="615553"/>
           </a:xfrm>
           <a:prstGeom prst="rect">
             <a:avLst/>
@@ -5770,20 +5777,26 @@
           </a:bodyPr>
           <a:lstStyle/>
           <a:p>
-            <a:pPr algn="l">
+            <a:pPr>
               <a:spcAft>
                 <a:spcPts val="600"/>
               </a:spcAft>
             </a:pPr>
             <a:r>
-              <a:rPr sz="3400" b="1">
+              <a:rPr lang="en-US" sz="3400" b="1" dirty="0">
                 <a:solidFill>
                   <a:srgbClr val="C0392B"/>
                 </a:solidFill>
                 <a:latin typeface="맑은 고딕"/>
               </a:rPr>
-              <a:t>RAC</a:t>
-            </a:r>
+              <a:t>RAC One Node</a:t>
+            </a:r>
+            <a:endParaRPr sz="3400" b="1" dirty="0">
+              <a:solidFill>
+                <a:srgbClr val="C0392B"/>
+              </a:solidFill>
+              <a:latin typeface="맑은 고딕"/>
+            </a:endParaRPr>
           </a:p>
         </p:txBody>
       </p:sp>
@@ -5874,7 +5887,7 @@
 </file>
 
 <file path=ppt/slides/slide10.xml><?xml version="1.0" encoding="utf-8"?>
-<p:sld xmlns:a="http://schemas.openxmlformats.org/drawingml/2006/main" xmlns:p="http://schemas.openxmlformats.org/presentationml/2006/main" xmlns:r="http://schemas.openxmlformats.org/officeDocument/2006/relationships">
+<p:sld xmlns:a="http://schemas.openxmlformats.org/drawingml/2006/main" xmlns:r="http://schemas.openxmlformats.org/officeDocument/2006/relationships" xmlns:p="http://schemas.openxmlformats.org/presentationml/2006/main">
   <p:cSld>
     <p:spTree>
       <p:nvGrpSpPr>
@@ -5882,7 +5895,14 @@
         <p:cNvGrpSpPr/>
         <p:nvPr/>
       </p:nvGrpSpPr>
-      <p:grpSpPr/>
+      <p:grpSpPr>
+        <a:xfrm>
+          <a:off x="0" y="0"/>
+          <a:ext cx="0" cy="0"/>
+          <a:chOff x="0" y="0"/>
+          <a:chExt cx="0" cy="0"/>
+        </a:xfrm>
+      </p:grpSpPr>
       <p:sp>
         <p:nvSpPr>
           <p:cNvPr id="2" name="Rectangle 1"/>
@@ -5924,6 +5944,7 @@
           <a:lstStyle/>
           <a:p>
             <a:pPr algn="ctr"/>
+            <a:endParaRPr/>
           </a:p>
         </p:txBody>
       </p:sp>
@@ -6046,6 +6067,7 @@
           <a:lstStyle/>
           <a:p>
             <a:pPr algn="ctr"/>
+            <a:endParaRPr/>
           </a:p>
         </p:txBody>
       </p:sp>
@@ -6113,7 +6135,7 @@
 </file>
 
 <file path=ppt/slides/slide11.xml><?xml version="1.0" encoding="utf-8"?>
-<p:sld xmlns:a="http://schemas.openxmlformats.org/drawingml/2006/main" xmlns:p="http://schemas.openxmlformats.org/presentationml/2006/main" xmlns:r="http://schemas.openxmlformats.org/officeDocument/2006/relationships">
+<p:sld xmlns:a="http://schemas.openxmlformats.org/drawingml/2006/main" xmlns:r="http://schemas.openxmlformats.org/officeDocument/2006/relationships" xmlns:p="http://schemas.openxmlformats.org/presentationml/2006/main">
   <p:cSld>
     <p:spTree>
       <p:nvGrpSpPr>
@@ -6121,7 +6143,14 @@
         <p:cNvGrpSpPr/>
         <p:nvPr/>
       </p:nvGrpSpPr>
-      <p:grpSpPr/>
+      <p:grpSpPr>
+        <a:xfrm>
+          <a:off x="0" y="0"/>
+          <a:ext cx="0" cy="0"/>
+          <a:chOff x="0" y="0"/>
+          <a:chExt cx="0" cy="0"/>
+        </a:xfrm>
+      </p:grpSpPr>
       <p:sp>
         <p:nvSpPr>
           <p:cNvPr id="2" name="Rectangle 1"/>
@@ -6163,6 +6192,7 @@
           <a:lstStyle/>
           <a:p>
             <a:pPr algn="ctr"/>
+            <a:endParaRPr/>
           </a:p>
         </p:txBody>
       </p:sp>
@@ -6356,7 +6386,7 @@
 </file>
 
 <file path=ppt/slides/slide12.xml><?xml version="1.0" encoding="utf-8"?>
-<p:sld xmlns:a="http://schemas.openxmlformats.org/drawingml/2006/main" xmlns:p="http://schemas.openxmlformats.org/presentationml/2006/main" xmlns:r="http://schemas.openxmlformats.org/officeDocument/2006/relationships">
+<p:sld xmlns:a="http://schemas.openxmlformats.org/drawingml/2006/main" xmlns:r="http://schemas.openxmlformats.org/officeDocument/2006/relationships" xmlns:p="http://schemas.openxmlformats.org/presentationml/2006/main">
   <p:cSld>
     <p:spTree>
       <p:nvGrpSpPr>
@@ -6364,7 +6394,14 @@
         <p:cNvGrpSpPr/>
         <p:nvPr/>
       </p:nvGrpSpPr>
-      <p:grpSpPr/>
+      <p:grpSpPr>
+        <a:xfrm>
+          <a:off x="0" y="0"/>
+          <a:ext cx="0" cy="0"/>
+          <a:chOff x="0" y="0"/>
+          <a:chExt cx="0" cy="0"/>
+        </a:xfrm>
+      </p:grpSpPr>
       <p:sp>
         <p:nvSpPr>
           <p:cNvPr id="2" name="Rectangle 1"/>
@@ -6406,6 +6443,7 @@
           <a:lstStyle/>
           <a:p>
             <a:pPr algn="ctr"/>
+            <a:endParaRPr/>
           </a:p>
         </p:txBody>
       </p:sp>
@@ -6599,7 +6637,7 @@
 </file>
 
 <file path=ppt/slides/slide13.xml><?xml version="1.0" encoding="utf-8"?>
-<p:sld xmlns:a="http://schemas.openxmlformats.org/drawingml/2006/main" xmlns:p="http://schemas.openxmlformats.org/presentationml/2006/main" xmlns:r="http://schemas.openxmlformats.org/officeDocument/2006/relationships">
+<p:sld xmlns:a="http://schemas.openxmlformats.org/drawingml/2006/main" xmlns:r="http://schemas.openxmlformats.org/officeDocument/2006/relationships" xmlns:p="http://schemas.openxmlformats.org/presentationml/2006/main">
   <p:cSld>
     <p:spTree>
       <p:nvGrpSpPr>
@@ -6607,7 +6645,14 @@
         <p:cNvGrpSpPr/>
         <p:nvPr/>
       </p:nvGrpSpPr>
-      <p:grpSpPr/>
+      <p:grpSpPr>
+        <a:xfrm>
+          <a:off x="0" y="0"/>
+          <a:ext cx="0" cy="0"/>
+          <a:chOff x="0" y="0"/>
+          <a:chExt cx="0" cy="0"/>
+        </a:xfrm>
+      </p:grpSpPr>
       <p:sp>
         <p:nvSpPr>
           <p:cNvPr id="2" name="Rectangle 1"/>
@@ -6649,6 +6694,7 @@
           <a:lstStyle/>
           <a:p>
             <a:pPr algn="ctr"/>
+            <a:endParaRPr/>
           </a:p>
         </p:txBody>
       </p:sp>
@@ -6842,7 +6888,7 @@
 </file>
 
 <file path=ppt/slides/slide14.xml><?xml version="1.0" encoding="utf-8"?>
-<p:sld xmlns:a="http://schemas.openxmlformats.org/drawingml/2006/main" xmlns:p="http://schemas.openxmlformats.org/presentationml/2006/main" xmlns:r="http://schemas.openxmlformats.org/officeDocument/2006/relationships">
+<p:sld xmlns:a="http://schemas.openxmlformats.org/drawingml/2006/main" xmlns:r="http://schemas.openxmlformats.org/officeDocument/2006/relationships" xmlns:p="http://schemas.openxmlformats.org/presentationml/2006/main">
   <p:cSld>
     <p:spTree>
       <p:nvGrpSpPr>
@@ -6850,7 +6896,14 @@
         <p:cNvGrpSpPr/>
         <p:nvPr/>
       </p:nvGrpSpPr>
-      <p:grpSpPr/>
+      <p:grpSpPr>
+        <a:xfrm>
+          <a:off x="0" y="0"/>
+          <a:ext cx="0" cy="0"/>
+          <a:chOff x="0" y="0"/>
+          <a:chExt cx="0" cy="0"/>
+        </a:xfrm>
+      </p:grpSpPr>
       <p:sp>
         <p:nvSpPr>
           <p:cNvPr id="2" name="Rectangle 1"/>
@@ -6892,6 +6945,7 @@
           <a:lstStyle/>
           <a:p>
             <a:pPr algn="ctr"/>
+            <a:endParaRPr/>
           </a:p>
         </p:txBody>
       </p:sp>
@@ -7085,7 +7139,7 @@
 </file>
 
 <file path=ppt/slides/slide15.xml><?xml version="1.0" encoding="utf-8"?>
-<p:sld xmlns:a="http://schemas.openxmlformats.org/drawingml/2006/main" xmlns:p="http://schemas.openxmlformats.org/presentationml/2006/main" xmlns:r="http://schemas.openxmlformats.org/officeDocument/2006/relationships">
+<p:sld xmlns:a="http://schemas.openxmlformats.org/drawingml/2006/main" xmlns:r="http://schemas.openxmlformats.org/officeDocument/2006/relationships" xmlns:p="http://schemas.openxmlformats.org/presentationml/2006/main">
   <p:cSld>
     <p:spTree>
       <p:nvGrpSpPr>
@@ -7093,7 +7147,14 @@
         <p:cNvGrpSpPr/>
         <p:nvPr/>
       </p:nvGrpSpPr>
-      <p:grpSpPr/>
+      <p:grpSpPr>
+        <a:xfrm>
+          <a:off x="0" y="0"/>
+          <a:ext cx="0" cy="0"/>
+          <a:chOff x="0" y="0"/>
+          <a:chExt cx="0" cy="0"/>
+        </a:xfrm>
+      </p:grpSpPr>
       <p:sp>
         <p:nvSpPr>
           <p:cNvPr id="2" name="Rectangle 1"/>
@@ -7135,6 +7196,7 @@
           <a:lstStyle/>
           <a:p>
             <a:pPr algn="ctr"/>
+            <a:endParaRPr/>
           </a:p>
         </p:txBody>
       </p:sp>
@@ -7328,7 +7390,7 @@
 </file>
 
 <file path=ppt/slides/slide16.xml><?xml version="1.0" encoding="utf-8"?>
-<p:sld xmlns:a="http://schemas.openxmlformats.org/drawingml/2006/main" xmlns:p="http://schemas.openxmlformats.org/presentationml/2006/main" xmlns:r="http://schemas.openxmlformats.org/officeDocument/2006/relationships">
+<p:sld xmlns:a="http://schemas.openxmlformats.org/drawingml/2006/main" xmlns:r="http://schemas.openxmlformats.org/officeDocument/2006/relationships" xmlns:p="http://schemas.openxmlformats.org/presentationml/2006/main">
   <p:cSld>
     <p:spTree>
       <p:nvGrpSpPr>
@@ -7336,7 +7398,14 @@
         <p:cNvGrpSpPr/>
         <p:nvPr/>
       </p:nvGrpSpPr>
-      <p:grpSpPr/>
+      <p:grpSpPr>
+        <a:xfrm>
+          <a:off x="0" y="0"/>
+          <a:ext cx="0" cy="0"/>
+          <a:chOff x="0" y="0"/>
+          <a:chExt cx="0" cy="0"/>
+        </a:xfrm>
+      </p:grpSpPr>
       <p:sp>
         <p:nvSpPr>
           <p:cNvPr id="2" name="Rectangle 1"/>
@@ -7378,6 +7447,7 @@
           <a:lstStyle/>
           <a:p>
             <a:pPr algn="ctr"/>
+            <a:endParaRPr/>
           </a:p>
         </p:txBody>
       </p:sp>
@@ -7500,6 +7570,7 @@
           <a:lstStyle/>
           <a:p>
             <a:pPr algn="ctr"/>
+            <a:endParaRPr/>
           </a:p>
         </p:txBody>
       </p:sp>
@@ -7567,7 +7638,7 @@
 </file>
 
 <file path=ppt/slides/slide17.xml><?xml version="1.0" encoding="utf-8"?>
-<p:sld xmlns:a="http://schemas.openxmlformats.org/drawingml/2006/main" xmlns:p="http://schemas.openxmlformats.org/presentationml/2006/main" xmlns:r="http://schemas.openxmlformats.org/officeDocument/2006/relationships">
+<p:sld xmlns:a="http://schemas.openxmlformats.org/drawingml/2006/main" xmlns:r="http://schemas.openxmlformats.org/officeDocument/2006/relationships" xmlns:p="http://schemas.openxmlformats.org/presentationml/2006/main">
   <p:cSld>
     <p:spTree>
       <p:nvGrpSpPr>
@@ -7575,7 +7646,14 @@
         <p:cNvGrpSpPr/>
         <p:nvPr/>
       </p:nvGrpSpPr>
-      <p:grpSpPr/>
+      <p:grpSpPr>
+        <a:xfrm>
+          <a:off x="0" y="0"/>
+          <a:ext cx="0" cy="0"/>
+          <a:chOff x="0" y="0"/>
+          <a:chExt cx="0" cy="0"/>
+        </a:xfrm>
+      </p:grpSpPr>
       <p:sp>
         <p:nvSpPr>
           <p:cNvPr id="2" name="Rectangle 1"/>
@@ -7617,6 +7695,7 @@
           <a:lstStyle/>
           <a:p>
             <a:pPr algn="ctr"/>
+            <a:endParaRPr/>
           </a:p>
         </p:txBody>
       </p:sp>
@@ -7810,7 +7889,7 @@
 </file>
 
 <file path=ppt/slides/slide18.xml><?xml version="1.0" encoding="utf-8"?>
-<p:sld xmlns:a="http://schemas.openxmlformats.org/drawingml/2006/main" xmlns:p="http://schemas.openxmlformats.org/presentationml/2006/main" xmlns:r="http://schemas.openxmlformats.org/officeDocument/2006/relationships">
+<p:sld xmlns:a="http://schemas.openxmlformats.org/drawingml/2006/main" xmlns:r="http://schemas.openxmlformats.org/officeDocument/2006/relationships" xmlns:p="http://schemas.openxmlformats.org/presentationml/2006/main">
   <p:cSld>
     <p:spTree>
       <p:nvGrpSpPr>
@@ -7818,7 +7897,14 @@
         <p:cNvGrpSpPr/>
         <p:nvPr/>
       </p:nvGrpSpPr>
-      <p:grpSpPr/>
+      <p:grpSpPr>
+        <a:xfrm>
+          <a:off x="0" y="0"/>
+          <a:ext cx="0" cy="0"/>
+          <a:chOff x="0" y="0"/>
+          <a:chExt cx="0" cy="0"/>
+        </a:xfrm>
+      </p:grpSpPr>
       <p:sp>
         <p:nvSpPr>
           <p:cNvPr id="2" name="Rectangle 1"/>
@@ -7860,6 +7946,7 @@
           <a:lstStyle/>
           <a:p>
             <a:pPr algn="ctr"/>
+            <a:endParaRPr/>
           </a:p>
         </p:txBody>
       </p:sp>
@@ -8053,7 +8140,7 @@
 </file>
 
 <file path=ppt/slides/slide19.xml><?xml version="1.0" encoding="utf-8"?>
-<p:sld xmlns:a="http://schemas.openxmlformats.org/drawingml/2006/main" xmlns:p="http://schemas.openxmlformats.org/presentationml/2006/main" xmlns:r="http://schemas.openxmlformats.org/officeDocument/2006/relationships">
+<p:sld xmlns:a="http://schemas.openxmlformats.org/drawingml/2006/main" xmlns:r="http://schemas.openxmlformats.org/officeDocument/2006/relationships" xmlns:p="http://schemas.openxmlformats.org/presentationml/2006/main">
   <p:cSld>
     <p:spTree>
       <p:nvGrpSpPr>
@@ -8061,7 +8148,14 @@
         <p:cNvGrpSpPr/>
         <p:nvPr/>
       </p:nvGrpSpPr>
-      <p:grpSpPr/>
+      <p:grpSpPr>
+        <a:xfrm>
+          <a:off x="0" y="0"/>
+          <a:ext cx="0" cy="0"/>
+          <a:chOff x="0" y="0"/>
+          <a:chExt cx="0" cy="0"/>
+        </a:xfrm>
+      </p:grpSpPr>
       <p:sp>
         <p:nvSpPr>
           <p:cNvPr id="2" name="Rectangle 1"/>
@@ -8103,6 +8197,7 @@
           <a:lstStyle/>
           <a:p>
             <a:pPr algn="ctr"/>
+            <a:endParaRPr/>
           </a:p>
         </p:txBody>
       </p:sp>
@@ -8296,7 +8391,7 @@
 </file>
 
 <file path=ppt/slides/slide2.xml><?xml version="1.0" encoding="utf-8"?>
-<p:sld xmlns:a="http://schemas.openxmlformats.org/drawingml/2006/main" xmlns:p="http://schemas.openxmlformats.org/presentationml/2006/main" xmlns:r="http://schemas.openxmlformats.org/officeDocument/2006/relationships">
+<p:sld xmlns:a="http://schemas.openxmlformats.org/drawingml/2006/main" xmlns:r="http://schemas.openxmlformats.org/officeDocument/2006/relationships" xmlns:p="http://schemas.openxmlformats.org/presentationml/2006/main">
   <p:cSld>
     <p:spTree>
       <p:nvGrpSpPr>
@@ -8304,7 +8399,14 @@
         <p:cNvGrpSpPr/>
         <p:nvPr/>
       </p:nvGrpSpPr>
-      <p:grpSpPr/>
+      <p:grpSpPr>
+        <a:xfrm>
+          <a:off x="0" y="0"/>
+          <a:ext cx="0" cy="0"/>
+          <a:chOff x="0" y="0"/>
+          <a:chExt cx="0" cy="0"/>
+        </a:xfrm>
+      </p:grpSpPr>
       <p:sp>
         <p:nvSpPr>
           <p:cNvPr id="2" name="Rectangle 1"/>
@@ -8346,6 +8448,7 @@
           <a:lstStyle/>
           <a:p>
             <a:pPr algn="ctr"/>
+            <a:endParaRPr/>
           </a:p>
         </p:txBody>
       </p:sp>
@@ -8516,7 +8619,7 @@
 </file>
 
 <file path=ppt/slides/slide20.xml><?xml version="1.0" encoding="utf-8"?>
-<p:sld xmlns:a="http://schemas.openxmlformats.org/drawingml/2006/main" xmlns:p="http://schemas.openxmlformats.org/presentationml/2006/main" xmlns:r="http://schemas.openxmlformats.org/officeDocument/2006/relationships">
+<p:sld xmlns:a="http://schemas.openxmlformats.org/drawingml/2006/main" xmlns:r="http://schemas.openxmlformats.org/officeDocument/2006/relationships" xmlns:p="http://schemas.openxmlformats.org/presentationml/2006/main">
   <p:cSld>
     <p:spTree>
       <p:nvGrpSpPr>
@@ -8524,7 +8627,14 @@
         <p:cNvGrpSpPr/>
         <p:nvPr/>
       </p:nvGrpSpPr>
-      <p:grpSpPr/>
+      <p:grpSpPr>
+        <a:xfrm>
+          <a:off x="0" y="0"/>
+          <a:ext cx="0" cy="0"/>
+          <a:chOff x="0" y="0"/>
+          <a:chExt cx="0" cy="0"/>
+        </a:xfrm>
+      </p:grpSpPr>
       <p:sp>
         <p:nvSpPr>
           <p:cNvPr id="2" name="Rectangle 1"/>
@@ -8566,6 +8676,7 @@
           <a:lstStyle/>
           <a:p>
             <a:pPr algn="ctr"/>
+            <a:endParaRPr/>
           </a:p>
         </p:txBody>
       </p:sp>
@@ -8759,7 +8870,7 @@
 </file>
 
 <file path=ppt/slides/slide21.xml><?xml version="1.0" encoding="utf-8"?>
-<p:sld xmlns:a="http://schemas.openxmlformats.org/drawingml/2006/main" xmlns:p="http://schemas.openxmlformats.org/presentationml/2006/main" xmlns:r="http://schemas.openxmlformats.org/officeDocument/2006/relationships">
+<p:sld xmlns:a="http://schemas.openxmlformats.org/drawingml/2006/main" xmlns:r="http://schemas.openxmlformats.org/officeDocument/2006/relationships" xmlns:p="http://schemas.openxmlformats.org/presentationml/2006/main">
   <p:cSld>
     <p:spTree>
       <p:nvGrpSpPr>
@@ -8767,7 +8878,14 @@
         <p:cNvGrpSpPr/>
         <p:nvPr/>
       </p:nvGrpSpPr>
-      <p:grpSpPr/>
+      <p:grpSpPr>
+        <a:xfrm>
+          <a:off x="0" y="0"/>
+          <a:ext cx="0" cy="0"/>
+          <a:chOff x="0" y="0"/>
+          <a:chExt cx="0" cy="0"/>
+        </a:xfrm>
+      </p:grpSpPr>
       <p:sp>
         <p:nvSpPr>
           <p:cNvPr id="2" name="Rectangle 1"/>
@@ -8809,6 +8927,7 @@
           <a:lstStyle/>
           <a:p>
             <a:pPr algn="ctr"/>
+            <a:endParaRPr/>
           </a:p>
         </p:txBody>
       </p:sp>
@@ -9002,7 +9121,7 @@
 </file>
 
 <file path=ppt/slides/slide22.xml><?xml version="1.0" encoding="utf-8"?>
-<p:sld xmlns:a="http://schemas.openxmlformats.org/drawingml/2006/main" xmlns:p="http://schemas.openxmlformats.org/presentationml/2006/main" xmlns:r="http://schemas.openxmlformats.org/officeDocument/2006/relationships">
+<p:sld xmlns:a="http://schemas.openxmlformats.org/drawingml/2006/main" xmlns:r="http://schemas.openxmlformats.org/officeDocument/2006/relationships" xmlns:p="http://schemas.openxmlformats.org/presentationml/2006/main">
   <p:cSld>
     <p:spTree>
       <p:nvGrpSpPr>
@@ -9010,7 +9129,14 @@
         <p:cNvGrpSpPr/>
         <p:nvPr/>
       </p:nvGrpSpPr>
-      <p:grpSpPr/>
+      <p:grpSpPr>
+        <a:xfrm>
+          <a:off x="0" y="0"/>
+          <a:ext cx="0" cy="0"/>
+          <a:chOff x="0" y="0"/>
+          <a:chExt cx="0" cy="0"/>
+        </a:xfrm>
+      </p:grpSpPr>
       <p:sp>
         <p:nvSpPr>
           <p:cNvPr id="2" name="Rectangle 1"/>
@@ -9052,6 +9178,7 @@
           <a:lstStyle/>
           <a:p>
             <a:pPr algn="ctr"/>
+            <a:endParaRPr/>
           </a:p>
         </p:txBody>
       </p:sp>
@@ -9245,7 +9372,7 @@
 </file>
 
 <file path=ppt/slides/slide23.xml><?xml version="1.0" encoding="utf-8"?>
-<p:sld xmlns:a="http://schemas.openxmlformats.org/drawingml/2006/main" xmlns:p="http://schemas.openxmlformats.org/presentationml/2006/main" xmlns:r="http://schemas.openxmlformats.org/officeDocument/2006/relationships">
+<p:sld xmlns:a="http://schemas.openxmlformats.org/drawingml/2006/main" xmlns:r="http://schemas.openxmlformats.org/officeDocument/2006/relationships" xmlns:p="http://schemas.openxmlformats.org/presentationml/2006/main">
   <p:cSld>
     <p:spTree>
       <p:nvGrpSpPr>
@@ -9253,7 +9380,14 @@
         <p:cNvGrpSpPr/>
         <p:nvPr/>
       </p:nvGrpSpPr>
-      <p:grpSpPr/>
+      <p:grpSpPr>
+        <a:xfrm>
+          <a:off x="0" y="0"/>
+          <a:ext cx="0" cy="0"/>
+          <a:chOff x="0" y="0"/>
+          <a:chExt cx="0" cy="0"/>
+        </a:xfrm>
+      </p:grpSpPr>
       <p:sp>
         <p:nvSpPr>
           <p:cNvPr id="2" name="Rectangle 1"/>
@@ -9295,6 +9429,7 @@
           <a:lstStyle/>
           <a:p>
             <a:pPr algn="ctr"/>
+            <a:endParaRPr/>
           </a:p>
         </p:txBody>
       </p:sp>
@@ -9417,6 +9552,7 @@
           <a:lstStyle/>
           <a:p>
             <a:pPr algn="ctr"/>
+            <a:endParaRPr/>
           </a:p>
         </p:txBody>
       </p:sp>
@@ -9484,7 +9620,7 @@
 </file>
 
 <file path=ppt/slides/slide24.xml><?xml version="1.0" encoding="utf-8"?>
-<p:sld xmlns:a="http://schemas.openxmlformats.org/drawingml/2006/main" xmlns:p="http://schemas.openxmlformats.org/presentationml/2006/main" xmlns:r="http://schemas.openxmlformats.org/officeDocument/2006/relationships">
+<p:sld xmlns:a="http://schemas.openxmlformats.org/drawingml/2006/main" xmlns:r="http://schemas.openxmlformats.org/officeDocument/2006/relationships" xmlns:p="http://schemas.openxmlformats.org/presentationml/2006/main">
   <p:cSld>
     <p:spTree>
       <p:nvGrpSpPr>
@@ -9492,7 +9628,14 @@
         <p:cNvGrpSpPr/>
         <p:nvPr/>
       </p:nvGrpSpPr>
-      <p:grpSpPr/>
+      <p:grpSpPr>
+        <a:xfrm>
+          <a:off x="0" y="0"/>
+          <a:ext cx="0" cy="0"/>
+          <a:chOff x="0" y="0"/>
+          <a:chExt cx="0" cy="0"/>
+        </a:xfrm>
+      </p:grpSpPr>
       <p:sp>
         <p:nvSpPr>
           <p:cNvPr id="2" name="Rectangle 1"/>
@@ -9534,6 +9677,7 @@
           <a:lstStyle/>
           <a:p>
             <a:pPr algn="ctr"/>
+            <a:endParaRPr/>
           </a:p>
         </p:txBody>
       </p:sp>
@@ -9727,7 +9871,7 @@
 </file>
 
 <file path=ppt/slides/slide25.xml><?xml version="1.0" encoding="utf-8"?>
-<p:sld xmlns:a="http://schemas.openxmlformats.org/drawingml/2006/main" xmlns:p="http://schemas.openxmlformats.org/presentationml/2006/main" xmlns:r="http://schemas.openxmlformats.org/officeDocument/2006/relationships">
+<p:sld xmlns:a="http://schemas.openxmlformats.org/drawingml/2006/main" xmlns:r="http://schemas.openxmlformats.org/officeDocument/2006/relationships" xmlns:p="http://schemas.openxmlformats.org/presentationml/2006/main">
   <p:cSld>
     <p:spTree>
       <p:nvGrpSpPr>
@@ -9735,7 +9879,14 @@
         <p:cNvGrpSpPr/>
         <p:nvPr/>
       </p:nvGrpSpPr>
-      <p:grpSpPr/>
+      <p:grpSpPr>
+        <a:xfrm>
+          <a:off x="0" y="0"/>
+          <a:ext cx="0" cy="0"/>
+          <a:chOff x="0" y="0"/>
+          <a:chExt cx="0" cy="0"/>
+        </a:xfrm>
+      </p:grpSpPr>
       <p:sp>
         <p:nvSpPr>
           <p:cNvPr id="2" name="Rectangle 1"/>
@@ -9777,6 +9928,7 @@
           <a:lstStyle/>
           <a:p>
             <a:pPr algn="ctr"/>
+            <a:endParaRPr/>
           </a:p>
         </p:txBody>
       </p:sp>
@@ -9970,7 +10122,7 @@
 </file>
 
 <file path=ppt/slides/slide26.xml><?xml version="1.0" encoding="utf-8"?>
-<p:sld xmlns:a="http://schemas.openxmlformats.org/drawingml/2006/main" xmlns:p="http://schemas.openxmlformats.org/presentationml/2006/main" xmlns:r="http://schemas.openxmlformats.org/officeDocument/2006/relationships">
+<p:sld xmlns:a="http://schemas.openxmlformats.org/drawingml/2006/main" xmlns:r="http://schemas.openxmlformats.org/officeDocument/2006/relationships" xmlns:p="http://schemas.openxmlformats.org/presentationml/2006/main">
   <p:cSld>
     <p:spTree>
       <p:nvGrpSpPr>
@@ -9978,7 +10130,14 @@
         <p:cNvGrpSpPr/>
         <p:nvPr/>
       </p:nvGrpSpPr>
-      <p:grpSpPr/>
+      <p:grpSpPr>
+        <a:xfrm>
+          <a:off x="0" y="0"/>
+          <a:ext cx="0" cy="0"/>
+          <a:chOff x="0" y="0"/>
+          <a:chExt cx="0" cy="0"/>
+        </a:xfrm>
+      </p:grpSpPr>
       <p:sp>
         <p:nvSpPr>
           <p:cNvPr id="2" name="Rectangle 1"/>
@@ -10020,6 +10179,7 @@
           <a:lstStyle/>
           <a:p>
             <a:pPr algn="ctr"/>
+            <a:endParaRPr/>
           </a:p>
         </p:txBody>
       </p:sp>
@@ -10213,7 +10373,7 @@
 </file>
 
 <file path=ppt/slides/slide27.xml><?xml version="1.0" encoding="utf-8"?>
-<p:sld xmlns:a="http://schemas.openxmlformats.org/drawingml/2006/main" xmlns:p="http://schemas.openxmlformats.org/presentationml/2006/main" xmlns:r="http://schemas.openxmlformats.org/officeDocument/2006/relationships">
+<p:sld xmlns:a="http://schemas.openxmlformats.org/drawingml/2006/main" xmlns:r="http://schemas.openxmlformats.org/officeDocument/2006/relationships" xmlns:p="http://schemas.openxmlformats.org/presentationml/2006/main">
   <p:cSld>
     <p:spTree>
       <p:nvGrpSpPr>
@@ -10221,7 +10381,14 @@
         <p:cNvGrpSpPr/>
         <p:nvPr/>
       </p:nvGrpSpPr>
-      <p:grpSpPr/>
+      <p:grpSpPr>
+        <a:xfrm>
+          <a:off x="0" y="0"/>
+          <a:ext cx="0" cy="0"/>
+          <a:chOff x="0" y="0"/>
+          <a:chExt cx="0" cy="0"/>
+        </a:xfrm>
+      </p:grpSpPr>
       <p:sp>
         <p:nvSpPr>
           <p:cNvPr id="2" name="Rectangle 1"/>
@@ -10263,6 +10430,7 @@
           <a:lstStyle/>
           <a:p>
             <a:pPr algn="ctr"/>
+            <a:endParaRPr/>
           </a:p>
         </p:txBody>
       </p:sp>
@@ -10456,7 +10624,7 @@
 </file>
 
 <file path=ppt/slides/slide28.xml><?xml version="1.0" encoding="utf-8"?>
-<p:sld xmlns:a="http://schemas.openxmlformats.org/drawingml/2006/main" xmlns:p="http://schemas.openxmlformats.org/presentationml/2006/main" xmlns:r="http://schemas.openxmlformats.org/officeDocument/2006/relationships">
+<p:sld xmlns:a="http://schemas.openxmlformats.org/drawingml/2006/main" xmlns:r="http://schemas.openxmlformats.org/officeDocument/2006/relationships" xmlns:p="http://schemas.openxmlformats.org/presentationml/2006/main">
   <p:cSld>
     <p:spTree>
       <p:nvGrpSpPr>
@@ -10464,7 +10632,14 @@
         <p:cNvGrpSpPr/>
         <p:nvPr/>
       </p:nvGrpSpPr>
-      <p:grpSpPr/>
+      <p:grpSpPr>
+        <a:xfrm>
+          <a:off x="0" y="0"/>
+          <a:ext cx="0" cy="0"/>
+          <a:chOff x="0" y="0"/>
+          <a:chExt cx="0" cy="0"/>
+        </a:xfrm>
+      </p:grpSpPr>
       <p:sp>
         <p:nvSpPr>
           <p:cNvPr id="2" name="Rectangle 1"/>
@@ -10506,6 +10681,7 @@
           <a:lstStyle/>
           <a:p>
             <a:pPr algn="ctr"/>
+            <a:endParaRPr/>
           </a:p>
         </p:txBody>
       </p:sp>
@@ -10628,6 +10804,7 @@
           <a:lstStyle/>
           <a:p>
             <a:pPr algn="ctr"/>
+            <a:endParaRPr/>
           </a:p>
         </p:txBody>
       </p:sp>
@@ -10695,7 +10872,7 @@
 </file>
 
 <file path=ppt/slides/slide29.xml><?xml version="1.0" encoding="utf-8"?>
-<p:sld xmlns:a="http://schemas.openxmlformats.org/drawingml/2006/main" xmlns:p="http://schemas.openxmlformats.org/presentationml/2006/main" xmlns:r="http://schemas.openxmlformats.org/officeDocument/2006/relationships">
+<p:sld xmlns:a="http://schemas.openxmlformats.org/drawingml/2006/main" xmlns:r="http://schemas.openxmlformats.org/officeDocument/2006/relationships" xmlns:p="http://schemas.openxmlformats.org/presentationml/2006/main">
   <p:cSld>
     <p:spTree>
       <p:nvGrpSpPr>
@@ -10703,7 +10880,14 @@
         <p:cNvGrpSpPr/>
         <p:nvPr/>
       </p:nvGrpSpPr>
-      <p:grpSpPr/>
+      <p:grpSpPr>
+        <a:xfrm>
+          <a:off x="0" y="0"/>
+          <a:ext cx="0" cy="0"/>
+          <a:chOff x="0" y="0"/>
+          <a:chExt cx="0" cy="0"/>
+        </a:xfrm>
+      </p:grpSpPr>
       <p:sp>
         <p:nvSpPr>
           <p:cNvPr id="2" name="Rectangle 1"/>
@@ -10745,6 +10929,7 @@
           <a:lstStyle/>
           <a:p>
             <a:pPr algn="ctr"/>
+            <a:endParaRPr/>
           </a:p>
         </p:txBody>
       </p:sp>
@@ -10938,7 +11123,7 @@
 </file>
 
 <file path=ppt/slides/slide3.xml><?xml version="1.0" encoding="utf-8"?>
-<p:sld xmlns:a="http://schemas.openxmlformats.org/drawingml/2006/main" xmlns:p="http://schemas.openxmlformats.org/presentationml/2006/main" xmlns:r="http://schemas.openxmlformats.org/officeDocument/2006/relationships">
+<p:sld xmlns:a="http://schemas.openxmlformats.org/drawingml/2006/main" xmlns:r="http://schemas.openxmlformats.org/officeDocument/2006/relationships" xmlns:p="http://schemas.openxmlformats.org/presentationml/2006/main">
   <p:cSld>
     <p:spTree>
       <p:nvGrpSpPr>
@@ -10946,7 +11131,14 @@
         <p:cNvGrpSpPr/>
         <p:nvPr/>
       </p:nvGrpSpPr>
-      <p:grpSpPr/>
+      <p:grpSpPr>
+        <a:xfrm>
+          <a:off x="0" y="0"/>
+          <a:ext cx="0" cy="0"/>
+          <a:chOff x="0" y="0"/>
+          <a:chExt cx="0" cy="0"/>
+        </a:xfrm>
+      </p:grpSpPr>
       <p:sp>
         <p:nvSpPr>
           <p:cNvPr id="2" name="Rectangle 1"/>
@@ -10988,6 +11180,7 @@
           <a:lstStyle/>
           <a:p>
             <a:pPr algn="ctr"/>
+            <a:endParaRPr/>
           </a:p>
         </p:txBody>
       </p:sp>
@@ -11174,7 +11367,7 @@
 </file>
 
 <file path=ppt/slides/slide30.xml><?xml version="1.0" encoding="utf-8"?>
-<p:sld xmlns:a="http://schemas.openxmlformats.org/drawingml/2006/main" xmlns:p="http://schemas.openxmlformats.org/presentationml/2006/main" xmlns:r="http://schemas.openxmlformats.org/officeDocument/2006/relationships">
+<p:sld xmlns:a="http://schemas.openxmlformats.org/drawingml/2006/main" xmlns:r="http://schemas.openxmlformats.org/officeDocument/2006/relationships" xmlns:p="http://schemas.openxmlformats.org/presentationml/2006/main">
   <p:cSld>
     <p:spTree>
       <p:nvGrpSpPr>
@@ -11182,7 +11375,14 @@
         <p:cNvGrpSpPr/>
         <p:nvPr/>
       </p:nvGrpSpPr>
-      <p:grpSpPr/>
+      <p:grpSpPr>
+        <a:xfrm>
+          <a:off x="0" y="0"/>
+          <a:ext cx="0" cy="0"/>
+          <a:chOff x="0" y="0"/>
+          <a:chExt cx="0" cy="0"/>
+        </a:xfrm>
+      </p:grpSpPr>
       <p:sp>
         <p:nvSpPr>
           <p:cNvPr id="2" name="Rectangle 1"/>
@@ -11224,6 +11424,7 @@
           <a:lstStyle/>
           <a:p>
             <a:pPr algn="ctr"/>
+            <a:endParaRPr/>
           </a:p>
         </p:txBody>
       </p:sp>
@@ -11417,7 +11618,7 @@
 </file>
 
 <file path=ppt/slides/slide31.xml><?xml version="1.0" encoding="utf-8"?>
-<p:sld xmlns:a="http://schemas.openxmlformats.org/drawingml/2006/main" xmlns:p="http://schemas.openxmlformats.org/presentationml/2006/main" xmlns:r="http://schemas.openxmlformats.org/officeDocument/2006/relationships">
+<p:sld xmlns:a="http://schemas.openxmlformats.org/drawingml/2006/main" xmlns:r="http://schemas.openxmlformats.org/officeDocument/2006/relationships" xmlns:p="http://schemas.openxmlformats.org/presentationml/2006/main">
   <p:cSld>
     <p:spTree>
       <p:nvGrpSpPr>
@@ -11425,7 +11626,14 @@
         <p:cNvGrpSpPr/>
         <p:nvPr/>
       </p:nvGrpSpPr>
-      <p:grpSpPr/>
+      <p:grpSpPr>
+        <a:xfrm>
+          <a:off x="0" y="0"/>
+          <a:ext cx="0" cy="0"/>
+          <a:chOff x="0" y="0"/>
+          <a:chExt cx="0" cy="0"/>
+        </a:xfrm>
+      </p:grpSpPr>
       <p:sp>
         <p:nvSpPr>
           <p:cNvPr id="2" name="Rectangle 1"/>
@@ -11467,6 +11675,7 @@
           <a:lstStyle/>
           <a:p>
             <a:pPr algn="ctr"/>
+            <a:endParaRPr/>
           </a:p>
         </p:txBody>
       </p:sp>
@@ -11660,7 +11869,7 @@
 </file>
 
 <file path=ppt/slides/slide32.xml><?xml version="1.0" encoding="utf-8"?>
-<p:sld xmlns:a="http://schemas.openxmlformats.org/drawingml/2006/main" xmlns:p="http://schemas.openxmlformats.org/presentationml/2006/main" xmlns:r="http://schemas.openxmlformats.org/officeDocument/2006/relationships">
+<p:sld xmlns:a="http://schemas.openxmlformats.org/drawingml/2006/main" xmlns:r="http://schemas.openxmlformats.org/officeDocument/2006/relationships" xmlns:p="http://schemas.openxmlformats.org/presentationml/2006/main">
   <p:cSld>
     <p:spTree>
       <p:nvGrpSpPr>
@@ -11668,7 +11877,14 @@
         <p:cNvGrpSpPr/>
         <p:nvPr/>
       </p:nvGrpSpPr>
-      <p:grpSpPr/>
+      <p:grpSpPr>
+        <a:xfrm>
+          <a:off x="0" y="0"/>
+          <a:ext cx="0" cy="0"/>
+          <a:chOff x="0" y="0"/>
+          <a:chExt cx="0" cy="0"/>
+        </a:xfrm>
+      </p:grpSpPr>
       <p:sp>
         <p:nvSpPr>
           <p:cNvPr id="2" name="Rectangle 1"/>
@@ -11710,6 +11926,7 @@
           <a:lstStyle/>
           <a:p>
             <a:pPr algn="ctr"/>
+            <a:endParaRPr/>
           </a:p>
         </p:txBody>
       </p:sp>
@@ -11903,7 +12120,7 @@
 </file>
 
 <file path=ppt/slides/slide33.xml><?xml version="1.0" encoding="utf-8"?>
-<p:sld xmlns:a="http://schemas.openxmlformats.org/drawingml/2006/main" xmlns:p="http://schemas.openxmlformats.org/presentationml/2006/main" xmlns:r="http://schemas.openxmlformats.org/officeDocument/2006/relationships">
+<p:sld xmlns:a="http://schemas.openxmlformats.org/drawingml/2006/main" xmlns:r="http://schemas.openxmlformats.org/officeDocument/2006/relationships" xmlns:p="http://schemas.openxmlformats.org/presentationml/2006/main">
   <p:cSld>
     <p:spTree>
       <p:nvGrpSpPr>
@@ -11911,7 +12128,14 @@
         <p:cNvGrpSpPr/>
         <p:nvPr/>
       </p:nvGrpSpPr>
-      <p:grpSpPr/>
+      <p:grpSpPr>
+        <a:xfrm>
+          <a:off x="0" y="0"/>
+          <a:ext cx="0" cy="0"/>
+          <a:chOff x="0" y="0"/>
+          <a:chExt cx="0" cy="0"/>
+        </a:xfrm>
+      </p:grpSpPr>
       <p:sp>
         <p:nvSpPr>
           <p:cNvPr id="2" name="Rectangle 1"/>
@@ -11953,6 +12177,7 @@
           <a:lstStyle/>
           <a:p>
             <a:pPr algn="ctr"/>
+            <a:endParaRPr/>
           </a:p>
         </p:txBody>
       </p:sp>
@@ -12075,6 +12300,7 @@
           <a:lstStyle/>
           <a:p>
             <a:pPr algn="ctr"/>
+            <a:endParaRPr/>
           </a:p>
         </p:txBody>
       </p:sp>
@@ -12142,7 +12368,7 @@
 </file>
 
 <file path=ppt/slides/slide34.xml><?xml version="1.0" encoding="utf-8"?>
-<p:sld xmlns:a="http://schemas.openxmlformats.org/drawingml/2006/main" xmlns:p="http://schemas.openxmlformats.org/presentationml/2006/main" xmlns:r="http://schemas.openxmlformats.org/officeDocument/2006/relationships">
+<p:sld xmlns:a="http://schemas.openxmlformats.org/drawingml/2006/main" xmlns:r="http://schemas.openxmlformats.org/officeDocument/2006/relationships" xmlns:p="http://schemas.openxmlformats.org/presentationml/2006/main">
   <p:cSld>
     <p:spTree>
       <p:nvGrpSpPr>
@@ -12150,7 +12376,14 @@
         <p:cNvGrpSpPr/>
         <p:nvPr/>
       </p:nvGrpSpPr>
-      <p:grpSpPr/>
+      <p:grpSpPr>
+        <a:xfrm>
+          <a:off x="0" y="0"/>
+          <a:ext cx="0" cy="0"/>
+          <a:chOff x="0" y="0"/>
+          <a:chExt cx="0" cy="0"/>
+        </a:xfrm>
+      </p:grpSpPr>
       <p:sp>
         <p:nvSpPr>
           <p:cNvPr id="2" name="Rectangle 1"/>
@@ -12192,6 +12425,7 @@
           <a:lstStyle/>
           <a:p>
             <a:pPr algn="ctr"/>
+            <a:endParaRPr/>
           </a:p>
         </p:txBody>
       </p:sp>
@@ -12385,7 +12619,7 @@
 </file>
 
 <file path=ppt/slides/slide35.xml><?xml version="1.0" encoding="utf-8"?>
-<p:sld xmlns:a="http://schemas.openxmlformats.org/drawingml/2006/main" xmlns:p="http://schemas.openxmlformats.org/presentationml/2006/main" xmlns:r="http://schemas.openxmlformats.org/officeDocument/2006/relationships">
+<p:sld xmlns:a="http://schemas.openxmlformats.org/drawingml/2006/main" xmlns:r="http://schemas.openxmlformats.org/officeDocument/2006/relationships" xmlns:p="http://schemas.openxmlformats.org/presentationml/2006/main">
   <p:cSld>
     <p:spTree>
       <p:nvGrpSpPr>
@@ -12393,7 +12627,14 @@
         <p:cNvGrpSpPr/>
         <p:nvPr/>
       </p:nvGrpSpPr>
-      <p:grpSpPr/>
+      <p:grpSpPr>
+        <a:xfrm>
+          <a:off x="0" y="0"/>
+          <a:ext cx="0" cy="0"/>
+          <a:chOff x="0" y="0"/>
+          <a:chExt cx="0" cy="0"/>
+        </a:xfrm>
+      </p:grpSpPr>
       <p:sp>
         <p:nvSpPr>
           <p:cNvPr id="2" name="Rectangle 1"/>
@@ -12435,6 +12676,7 @@
           <a:lstStyle/>
           <a:p>
             <a:pPr algn="ctr"/>
+            <a:endParaRPr/>
           </a:p>
         </p:txBody>
       </p:sp>
@@ -12628,7 +12870,7 @@
 </file>
 
 <file path=ppt/slides/slide36.xml><?xml version="1.0" encoding="utf-8"?>
-<p:sld xmlns:a="http://schemas.openxmlformats.org/drawingml/2006/main" xmlns:p="http://schemas.openxmlformats.org/presentationml/2006/main" xmlns:r="http://schemas.openxmlformats.org/officeDocument/2006/relationships">
+<p:sld xmlns:a="http://schemas.openxmlformats.org/drawingml/2006/main" xmlns:r="http://schemas.openxmlformats.org/officeDocument/2006/relationships" xmlns:p="http://schemas.openxmlformats.org/presentationml/2006/main">
   <p:cSld>
     <p:spTree>
       <p:nvGrpSpPr>
@@ -12636,7 +12878,14 @@
         <p:cNvGrpSpPr/>
         <p:nvPr/>
       </p:nvGrpSpPr>
-      <p:grpSpPr/>
+      <p:grpSpPr>
+        <a:xfrm>
+          <a:off x="0" y="0"/>
+          <a:ext cx="0" cy="0"/>
+          <a:chOff x="0" y="0"/>
+          <a:chExt cx="0" cy="0"/>
+        </a:xfrm>
+      </p:grpSpPr>
       <p:sp>
         <p:nvSpPr>
           <p:cNvPr id="2" name="Rectangle 1"/>
@@ -12678,6 +12927,7 @@
           <a:lstStyle/>
           <a:p>
             <a:pPr algn="ctr"/>
+            <a:endParaRPr/>
           </a:p>
         </p:txBody>
       </p:sp>
@@ -12871,7 +13121,7 @@
 </file>
 
 <file path=ppt/slides/slide37.xml><?xml version="1.0" encoding="utf-8"?>
-<p:sld xmlns:a="http://schemas.openxmlformats.org/drawingml/2006/main" xmlns:p="http://schemas.openxmlformats.org/presentationml/2006/main" xmlns:r="http://schemas.openxmlformats.org/officeDocument/2006/relationships">
+<p:sld xmlns:a="http://schemas.openxmlformats.org/drawingml/2006/main" xmlns:r="http://schemas.openxmlformats.org/officeDocument/2006/relationships" xmlns:p="http://schemas.openxmlformats.org/presentationml/2006/main">
   <p:cSld>
     <p:spTree>
       <p:nvGrpSpPr>
@@ -12879,7 +13129,14 @@
         <p:cNvGrpSpPr/>
         <p:nvPr/>
       </p:nvGrpSpPr>
-      <p:grpSpPr/>
+      <p:grpSpPr>
+        <a:xfrm>
+          <a:off x="0" y="0"/>
+          <a:ext cx="0" cy="0"/>
+          <a:chOff x="0" y="0"/>
+          <a:chExt cx="0" cy="0"/>
+        </a:xfrm>
+      </p:grpSpPr>
       <p:sp>
         <p:nvSpPr>
           <p:cNvPr id="2" name="Rectangle 1"/>
@@ -12921,6 +13178,7 @@
           <a:lstStyle/>
           <a:p>
             <a:pPr algn="ctr"/>
+            <a:endParaRPr/>
           </a:p>
         </p:txBody>
       </p:sp>
@@ -13043,6 +13301,7 @@
           <a:lstStyle/>
           <a:p>
             <a:pPr algn="ctr"/>
+            <a:endParaRPr/>
           </a:p>
         </p:txBody>
       </p:sp>
@@ -13110,7 +13369,7 @@
 </file>
 
 <file path=ppt/slides/slide38.xml><?xml version="1.0" encoding="utf-8"?>
-<p:sld xmlns:a="http://schemas.openxmlformats.org/drawingml/2006/main" xmlns:p="http://schemas.openxmlformats.org/presentationml/2006/main" xmlns:r="http://schemas.openxmlformats.org/officeDocument/2006/relationships">
+<p:sld xmlns:a="http://schemas.openxmlformats.org/drawingml/2006/main" xmlns:r="http://schemas.openxmlformats.org/officeDocument/2006/relationships" xmlns:p="http://schemas.openxmlformats.org/presentationml/2006/main">
   <p:cSld>
     <p:spTree>
       <p:nvGrpSpPr>
@@ -13118,7 +13377,14 @@
         <p:cNvGrpSpPr/>
         <p:nvPr/>
       </p:nvGrpSpPr>
-      <p:grpSpPr/>
+      <p:grpSpPr>
+        <a:xfrm>
+          <a:off x="0" y="0"/>
+          <a:ext cx="0" cy="0"/>
+          <a:chOff x="0" y="0"/>
+          <a:chExt cx="0" cy="0"/>
+        </a:xfrm>
+      </p:grpSpPr>
       <p:sp>
         <p:nvSpPr>
           <p:cNvPr id="2" name="Rectangle 1"/>
@@ -13160,6 +13426,7 @@
           <a:lstStyle/>
           <a:p>
             <a:pPr algn="ctr"/>
+            <a:endParaRPr/>
           </a:p>
         </p:txBody>
       </p:sp>
@@ -13353,7 +13620,7 @@
 </file>
 
 <file path=ppt/slides/slide39.xml><?xml version="1.0" encoding="utf-8"?>
-<p:sld xmlns:a="http://schemas.openxmlformats.org/drawingml/2006/main" xmlns:p="http://schemas.openxmlformats.org/presentationml/2006/main" xmlns:r="http://schemas.openxmlformats.org/officeDocument/2006/relationships">
+<p:sld xmlns:a="http://schemas.openxmlformats.org/drawingml/2006/main" xmlns:r="http://schemas.openxmlformats.org/officeDocument/2006/relationships" xmlns:p="http://schemas.openxmlformats.org/presentationml/2006/main">
   <p:cSld>
     <p:spTree>
       <p:nvGrpSpPr>
@@ -13361,7 +13628,14 @@
         <p:cNvGrpSpPr/>
         <p:nvPr/>
       </p:nvGrpSpPr>
-      <p:grpSpPr/>
+      <p:grpSpPr>
+        <a:xfrm>
+          <a:off x="0" y="0"/>
+          <a:ext cx="0" cy="0"/>
+          <a:chOff x="0" y="0"/>
+          <a:chExt cx="0" cy="0"/>
+        </a:xfrm>
+      </p:grpSpPr>
       <p:sp>
         <p:nvSpPr>
           <p:cNvPr id="2" name="Rectangle 1"/>
@@ -13403,6 +13677,7 @@
           <a:lstStyle/>
           <a:p>
             <a:pPr algn="ctr"/>
+            <a:endParaRPr/>
           </a:p>
         </p:txBody>
       </p:sp>
@@ -13596,7 +13871,7 @@
 </file>
 
 <file path=ppt/slides/slide4.xml><?xml version="1.0" encoding="utf-8"?>
-<p:sld xmlns:a="http://schemas.openxmlformats.org/drawingml/2006/main" xmlns:p="http://schemas.openxmlformats.org/presentationml/2006/main" xmlns:r="http://schemas.openxmlformats.org/officeDocument/2006/relationships">
+<p:sld xmlns:a="http://schemas.openxmlformats.org/drawingml/2006/main" xmlns:r="http://schemas.openxmlformats.org/officeDocument/2006/relationships" xmlns:p="http://schemas.openxmlformats.org/presentationml/2006/main">
   <p:cSld>
     <p:spTree>
       <p:nvGrpSpPr>
@@ -13604,7 +13879,14 @@
         <p:cNvGrpSpPr/>
         <p:nvPr/>
       </p:nvGrpSpPr>
-      <p:grpSpPr/>
+      <p:grpSpPr>
+        <a:xfrm>
+          <a:off x="0" y="0"/>
+          <a:ext cx="0" cy="0"/>
+          <a:chOff x="0" y="0"/>
+          <a:chExt cx="0" cy="0"/>
+        </a:xfrm>
+      </p:grpSpPr>
       <p:sp>
         <p:nvSpPr>
           <p:cNvPr id="2" name="Rectangle 1"/>
@@ -13646,6 +13928,7 @@
           <a:lstStyle/>
           <a:p>
             <a:pPr algn="ctr"/>
+            <a:endParaRPr/>
           </a:p>
         </p:txBody>
       </p:sp>
@@ -13839,7 +14122,7 @@
 </file>
 
 <file path=ppt/slides/slide40.xml><?xml version="1.0" encoding="utf-8"?>
-<p:sld xmlns:a="http://schemas.openxmlformats.org/drawingml/2006/main" xmlns:p="http://schemas.openxmlformats.org/presentationml/2006/main" xmlns:r="http://schemas.openxmlformats.org/officeDocument/2006/relationships">
+<p:sld xmlns:a="http://schemas.openxmlformats.org/drawingml/2006/main" xmlns:r="http://schemas.openxmlformats.org/officeDocument/2006/relationships" xmlns:p="http://schemas.openxmlformats.org/presentationml/2006/main">
   <p:cSld>
     <p:spTree>
       <p:nvGrpSpPr>
@@ -13847,7 +14130,14 @@
         <p:cNvGrpSpPr/>
         <p:nvPr/>
       </p:nvGrpSpPr>
-      <p:grpSpPr/>
+      <p:grpSpPr>
+        <a:xfrm>
+          <a:off x="0" y="0"/>
+          <a:ext cx="0" cy="0"/>
+          <a:chOff x="0" y="0"/>
+          <a:chExt cx="0" cy="0"/>
+        </a:xfrm>
+      </p:grpSpPr>
       <p:sp>
         <p:nvSpPr>
           <p:cNvPr id="2" name="Rectangle 1"/>
@@ -13889,6 +14179,7 @@
           <a:lstStyle/>
           <a:p>
             <a:pPr algn="ctr"/>
+            <a:endParaRPr/>
           </a:p>
         </p:txBody>
       </p:sp>
@@ -14082,7 +14373,7 @@
 </file>
 
 <file path=ppt/slides/slide5.xml><?xml version="1.0" encoding="utf-8"?>
-<p:sld xmlns:a="http://schemas.openxmlformats.org/drawingml/2006/main" xmlns:p="http://schemas.openxmlformats.org/presentationml/2006/main" xmlns:r="http://schemas.openxmlformats.org/officeDocument/2006/relationships">
+<p:sld xmlns:a="http://schemas.openxmlformats.org/drawingml/2006/main" xmlns:r="http://schemas.openxmlformats.org/officeDocument/2006/relationships" xmlns:p="http://schemas.openxmlformats.org/presentationml/2006/main">
   <p:cSld>
     <p:spTree>
       <p:nvGrpSpPr>
@@ -14090,7 +14381,14 @@
         <p:cNvGrpSpPr/>
         <p:nvPr/>
       </p:nvGrpSpPr>
-      <p:grpSpPr/>
+      <p:grpSpPr>
+        <a:xfrm>
+          <a:off x="0" y="0"/>
+          <a:ext cx="0" cy="0"/>
+          <a:chOff x="0" y="0"/>
+          <a:chExt cx="0" cy="0"/>
+        </a:xfrm>
+      </p:grpSpPr>
       <p:sp>
         <p:nvSpPr>
           <p:cNvPr id="2" name="Rectangle 1"/>
@@ -14132,6 +14430,7 @@
           <a:lstStyle/>
           <a:p>
             <a:pPr algn="ctr"/>
+            <a:endParaRPr/>
           </a:p>
         </p:txBody>
       </p:sp>
@@ -14254,6 +14553,7 @@
           <a:lstStyle/>
           <a:p>
             <a:pPr algn="ctr"/>
+            <a:endParaRPr/>
           </a:p>
         </p:txBody>
       </p:sp>
@@ -14321,7 +14621,7 @@
 </file>
 
 <file path=ppt/slides/slide6.xml><?xml version="1.0" encoding="utf-8"?>
-<p:sld xmlns:a="http://schemas.openxmlformats.org/drawingml/2006/main" xmlns:p="http://schemas.openxmlformats.org/presentationml/2006/main" xmlns:r="http://schemas.openxmlformats.org/officeDocument/2006/relationships">
+<p:sld xmlns:a="http://schemas.openxmlformats.org/drawingml/2006/main" xmlns:r="http://schemas.openxmlformats.org/officeDocument/2006/relationships" xmlns:p="http://schemas.openxmlformats.org/presentationml/2006/main">
   <p:cSld>
     <p:spTree>
       <p:nvGrpSpPr>
@@ -14329,7 +14629,14 @@
         <p:cNvGrpSpPr/>
         <p:nvPr/>
       </p:nvGrpSpPr>
-      <p:grpSpPr/>
+      <p:grpSpPr>
+        <a:xfrm>
+          <a:off x="0" y="0"/>
+          <a:ext cx="0" cy="0"/>
+          <a:chOff x="0" y="0"/>
+          <a:chExt cx="0" cy="0"/>
+        </a:xfrm>
+      </p:grpSpPr>
       <p:sp>
         <p:nvSpPr>
           <p:cNvPr id="2" name="Rectangle 1"/>
@@ -14371,6 +14678,7 @@
           <a:lstStyle/>
           <a:p>
             <a:pPr algn="ctr"/>
+            <a:endParaRPr/>
           </a:p>
         </p:txBody>
       </p:sp>
@@ -14564,7 +14872,7 @@
 </file>
 
 <file path=ppt/slides/slide7.xml><?xml version="1.0" encoding="utf-8"?>
-<p:sld xmlns:a="http://schemas.openxmlformats.org/drawingml/2006/main" xmlns:p="http://schemas.openxmlformats.org/presentationml/2006/main" xmlns:r="http://schemas.openxmlformats.org/officeDocument/2006/relationships">
+<p:sld xmlns:a="http://schemas.openxmlformats.org/drawingml/2006/main" xmlns:r="http://schemas.openxmlformats.org/officeDocument/2006/relationships" xmlns:p="http://schemas.openxmlformats.org/presentationml/2006/main">
   <p:cSld>
     <p:spTree>
       <p:nvGrpSpPr>
@@ -14572,7 +14880,14 @@
         <p:cNvGrpSpPr/>
         <p:nvPr/>
       </p:nvGrpSpPr>
-      <p:grpSpPr/>
+      <p:grpSpPr>
+        <a:xfrm>
+          <a:off x="0" y="0"/>
+          <a:ext cx="0" cy="0"/>
+          <a:chOff x="0" y="0"/>
+          <a:chExt cx="0" cy="0"/>
+        </a:xfrm>
+      </p:grpSpPr>
       <p:sp>
         <p:nvSpPr>
           <p:cNvPr id="2" name="Rectangle 1"/>
@@ -14614,6 +14929,7 @@
           <a:lstStyle/>
           <a:p>
             <a:pPr algn="ctr"/>
+            <a:endParaRPr/>
           </a:p>
         </p:txBody>
       </p:sp>
@@ -14807,7 +15123,7 @@
 </file>
 
 <file path=ppt/slides/slide8.xml><?xml version="1.0" encoding="utf-8"?>
-<p:sld xmlns:a="http://schemas.openxmlformats.org/drawingml/2006/main" xmlns:p="http://schemas.openxmlformats.org/presentationml/2006/main" xmlns:r="http://schemas.openxmlformats.org/officeDocument/2006/relationships">
+<p:sld xmlns:a="http://schemas.openxmlformats.org/drawingml/2006/main" xmlns:r="http://schemas.openxmlformats.org/officeDocument/2006/relationships" xmlns:p="http://schemas.openxmlformats.org/presentationml/2006/main">
   <p:cSld>
     <p:spTree>
       <p:nvGrpSpPr>
@@ -14815,7 +15131,14 @@
         <p:cNvGrpSpPr/>
         <p:nvPr/>
       </p:nvGrpSpPr>
-      <p:grpSpPr/>
+      <p:grpSpPr>
+        <a:xfrm>
+          <a:off x="0" y="0"/>
+          <a:ext cx="0" cy="0"/>
+          <a:chOff x="0" y="0"/>
+          <a:chExt cx="0" cy="0"/>
+        </a:xfrm>
+      </p:grpSpPr>
       <p:sp>
         <p:nvSpPr>
           <p:cNvPr id="2" name="Rectangle 1"/>
@@ -14857,6 +15180,7 @@
           <a:lstStyle/>
           <a:p>
             <a:pPr algn="ctr"/>
+            <a:endParaRPr/>
           </a:p>
         </p:txBody>
       </p:sp>
@@ -15050,7 +15374,7 @@
 </file>
 
 <file path=ppt/slides/slide9.xml><?xml version="1.0" encoding="utf-8"?>
-<p:sld xmlns:a="http://schemas.openxmlformats.org/drawingml/2006/main" xmlns:p="http://schemas.openxmlformats.org/presentationml/2006/main" xmlns:r="http://schemas.openxmlformats.org/officeDocument/2006/relationships">
+<p:sld xmlns:a="http://schemas.openxmlformats.org/drawingml/2006/main" xmlns:r="http://schemas.openxmlformats.org/officeDocument/2006/relationships" xmlns:p="http://schemas.openxmlformats.org/presentationml/2006/main">
   <p:cSld>
     <p:spTree>
       <p:nvGrpSpPr>
@@ -15058,7 +15382,14 @@
         <p:cNvGrpSpPr/>
         <p:nvPr/>
       </p:nvGrpSpPr>
-      <p:grpSpPr/>
+      <p:grpSpPr>
+        <a:xfrm>
+          <a:off x="0" y="0"/>
+          <a:ext cx="0" cy="0"/>
+          <a:chOff x="0" y="0"/>
+          <a:chExt cx="0" cy="0"/>
+        </a:xfrm>
+      </p:grpSpPr>
       <p:sp>
         <p:nvSpPr>
           <p:cNvPr id="2" name="Rectangle 1"/>
@@ -15100,6 +15431,7 @@
           <a:lstStyle/>
           <a:p>
             <a:pPr algn="ctr"/>
+            <a:endParaRPr/>
           </a:p>
         </p:txBody>
       </p:sp>
@@ -15613,7 +15945,7 @@
 </file>
 
 <file path=ppt/theme/theme2.xml><?xml version="1.0" encoding="utf-8"?>
-<a:theme xmlns:a="http://schemas.openxmlformats.org/drawingml/2006/main" name="Office Theme">
+<a:theme xmlns:a="http://schemas.openxmlformats.org/drawingml/2006/main" name="Office 테마">
   <a:themeElements>
     <a:clrScheme name="Office">
       <a:dk1>
@@ -15623,44 +15955,44 @@
         <a:sysClr val="window" lastClr="FFFFFF"/>
       </a:lt1>
       <a:dk2>
-        <a:srgbClr val="1F497D"/>
+        <a:srgbClr val="0E2841"/>
       </a:dk2>
       <a:lt2>
-        <a:srgbClr val="EEECE1"/>
+        <a:srgbClr val="E8E8E8"/>
       </a:lt2>
       <a:accent1>
-        <a:srgbClr val="4F81BD"/>
+        <a:srgbClr val="156082"/>
       </a:accent1>
       <a:accent2>
-        <a:srgbClr val="C0504D"/>
+        <a:srgbClr val="E97132"/>
       </a:accent2>
       <a:accent3>
-        <a:srgbClr val="9BBB59"/>
+        <a:srgbClr val="196B24"/>
       </a:accent3>
       <a:accent4>
-        <a:srgbClr val="8064A2"/>
+        <a:srgbClr val="0F9ED5"/>
       </a:accent4>
       <a:accent5>
-        <a:srgbClr val="4BACC6"/>
+        <a:srgbClr val="A02B93"/>
       </a:accent5>
       <a:accent6>
-        <a:srgbClr val="F79646"/>
+        <a:srgbClr val="4EA72E"/>
       </a:accent6>
       <a:hlink>
-        <a:srgbClr val="0000FF"/>
+        <a:srgbClr val="467886"/>
       </a:hlink>
       <a:folHlink>
-        <a:srgbClr val="800080"/>
+        <a:srgbClr val="96607D"/>
       </a:folHlink>
     </a:clrScheme>
     <a:fontScheme name="Office">
       <a:majorFont>
-        <a:latin typeface="Calibri"/>
+        <a:latin typeface="맑은 고딕" panose="02110004020202020204"/>
         <a:ea typeface=""/>
         <a:cs typeface=""/>
-        <a:font script="Jpan" typeface="ＭＳ Ｐゴシック"/>
+        <a:font script="Jpan" typeface="游ゴシック Light"/>
         <a:font script="Hang" typeface="맑은 고딕"/>
-        <a:font script="Hans" typeface="宋体"/>
+        <a:font script="Hans" typeface="等线 Light"/>
         <a:font script="Hant" typeface="新細明體"/>
         <a:font script="Arab" typeface="Times New Roman"/>
         <a:font script="Hebr" typeface="Times New Roman"/>
@@ -15688,14 +16020,31 @@
         <a:font script="Viet" typeface="Times New Roman"/>
         <a:font script="Uigh" typeface="Microsoft Uighur"/>
         <a:font script="Geor" typeface="Sylfaen"/>
+        <a:font script="Armn" typeface="Arial"/>
+        <a:font script="Bugi" typeface="Leelawadee UI"/>
+        <a:font script="Bopo" typeface="Microsoft JhengHei"/>
+        <a:font script="Java" typeface="Javanese Text"/>
+        <a:font script="Lisu" typeface="Segoe UI"/>
+        <a:font script="Mymr" typeface="Myanmar Text"/>
+        <a:font script="Nkoo" typeface="Ebrima"/>
+        <a:font script="Olck" typeface="Nirmala UI"/>
+        <a:font script="Osma" typeface="Ebrima"/>
+        <a:font script="Phag" typeface="Phagspa"/>
+        <a:font script="Syrn" typeface="Estrangelo Edessa"/>
+        <a:font script="Syrj" typeface="Estrangelo Edessa"/>
+        <a:font script="Syre" typeface="Estrangelo Edessa"/>
+        <a:font script="Sora" typeface="Nirmala UI"/>
+        <a:font script="Tale" typeface="Microsoft Tai Le"/>
+        <a:font script="Talu" typeface="Microsoft New Tai Lue"/>
+        <a:font script="Tfng" typeface="Ebrima"/>
       </a:majorFont>
       <a:minorFont>
-        <a:latin typeface="Calibri"/>
+        <a:latin typeface="맑은 고딕" panose="02110004020202020204"/>
         <a:ea typeface=""/>
         <a:cs typeface=""/>
-        <a:font script="Jpan" typeface="ＭＳ Ｐゴシック"/>
+        <a:font script="Jpan" typeface="游ゴシック"/>
         <a:font script="Hang" typeface="맑은 고딕"/>
-        <a:font script="Hans" typeface="宋体"/>
+        <a:font script="Hans" typeface="等线"/>
         <a:font script="Hant" typeface="新細明體"/>
         <a:font script="Arab" typeface="Arial"/>
         <a:font script="Hebr" typeface="Arial"/>
@@ -15723,6 +16072,23 @@
         <a:font script="Viet" typeface="Arial"/>
         <a:font script="Uigh" typeface="Microsoft Uighur"/>
         <a:font script="Geor" typeface="Sylfaen"/>
+        <a:font script="Armn" typeface="Arial"/>
+        <a:font script="Bugi" typeface="Leelawadee UI"/>
+        <a:font script="Bopo" typeface="Microsoft JhengHei"/>
+        <a:font script="Java" typeface="Javanese Text"/>
+        <a:font script="Lisu" typeface="Segoe UI"/>
+        <a:font script="Mymr" typeface="Myanmar Text"/>
+        <a:font script="Nkoo" typeface="Ebrima"/>
+        <a:font script="Olck" typeface="Nirmala UI"/>
+        <a:font script="Osma" typeface="Ebrima"/>
+        <a:font script="Phag" typeface="Phagspa"/>
+        <a:font script="Syrn" typeface="Estrangelo Edessa"/>
+        <a:font script="Syrj" typeface="Estrangelo Edessa"/>
+        <a:font script="Syre" typeface="Estrangelo Edessa"/>
+        <a:font script="Sora" typeface="Nirmala UI"/>
+        <a:font script="Tale" typeface="Microsoft Tai Le"/>
+        <a:font script="Talu" typeface="Microsoft New Tai Lue"/>
+        <a:font script="Tfng" typeface="Ebrima"/>
       </a:minorFont>
     </a:fontScheme>
     <a:fmtScheme name="Office">
@@ -15734,180 +16100,136 @@
           <a:gsLst>
             <a:gs pos="0">
               <a:schemeClr val="phClr">
-                <a:tint val="50000"/>
-                <a:satMod val="300000"/>
+                <a:lumMod val="110000"/>
+                <a:satMod val="105000"/>
+                <a:tint val="67000"/>
               </a:schemeClr>
             </a:gs>
-            <a:gs pos="35000">
+            <a:gs pos="50000">
               <a:schemeClr val="phClr">
-                <a:tint val="37000"/>
-                <a:satMod val="300000"/>
+                <a:lumMod val="105000"/>
+                <a:satMod val="103000"/>
+                <a:tint val="73000"/>
               </a:schemeClr>
             </a:gs>
             <a:gs pos="100000">
               <a:schemeClr val="phClr">
-                <a:tint val="15000"/>
-                <a:satMod val="350000"/>
+                <a:lumMod val="105000"/>
+                <a:satMod val="109000"/>
+                <a:tint val="81000"/>
               </a:schemeClr>
             </a:gs>
           </a:gsLst>
-          <a:lin ang="16200000" scaled="1"/>
+          <a:lin ang="5400000" scaled="0"/>
         </a:gradFill>
         <a:gradFill rotWithShape="1">
           <a:gsLst>
             <a:gs pos="0">
               <a:schemeClr val="phClr">
-                <a:tint val="100000"/>
+                <a:satMod val="103000"/>
+                <a:lumMod val="102000"/>
+                <a:tint val="94000"/>
+              </a:schemeClr>
+            </a:gs>
+            <a:gs pos="50000">
+              <a:schemeClr val="phClr">
+                <a:satMod val="110000"/>
+                <a:lumMod val="100000"/>
                 <a:shade val="100000"/>
-                <a:satMod val="130000"/>
               </a:schemeClr>
             </a:gs>
             <a:gs pos="100000">
               <a:schemeClr val="phClr">
-                <a:tint val="50000"/>
-                <a:shade val="100000"/>
-                <a:satMod val="350000"/>
+                <a:lumMod val="99000"/>
+                <a:satMod val="120000"/>
+                <a:shade val="78000"/>
               </a:schemeClr>
             </a:gs>
           </a:gsLst>
-          <a:lin ang="16200000" scaled="0"/>
+          <a:lin ang="5400000" scaled="0"/>
         </a:gradFill>
       </a:fillStyleLst>
       <a:lnStyleLst>
-        <a:ln w="9525" cap="flat" cmpd="sng" algn="ctr">
+        <a:ln w="12700" cap="flat" cmpd="sng" algn="ctr">
           <a:solidFill>
-            <a:schemeClr val="phClr">
-              <a:shade val="95000"/>
-              <a:satMod val="105000"/>
-            </a:schemeClr>
+            <a:schemeClr val="phClr"/>
           </a:solidFill>
           <a:prstDash val="solid"/>
+          <a:miter lim="800000"/>
+        </a:ln>
+        <a:ln w="19050" cap="flat" cmpd="sng" algn="ctr">
+          <a:solidFill>
+            <a:schemeClr val="phClr"/>
+          </a:solidFill>
+          <a:prstDash val="solid"/>
+          <a:miter lim="800000"/>
         </a:ln>
         <a:ln w="25400" cap="flat" cmpd="sng" algn="ctr">
           <a:solidFill>
             <a:schemeClr val="phClr"/>
           </a:solidFill>
           <a:prstDash val="solid"/>
-        </a:ln>
-        <a:ln w="38100" cap="flat" cmpd="sng" algn="ctr">
-          <a:solidFill>
-            <a:schemeClr val="phClr"/>
-          </a:solidFill>
-          <a:prstDash val="solid"/>
+          <a:miter lim="800000"/>
         </a:ln>
       </a:lnStyleLst>
       <a:effectStyleLst>
         <a:effectStyle>
+          <a:effectLst/>
+        </a:effectStyle>
+        <a:effectStyle>
+          <a:effectLst/>
+        </a:effectStyle>
+        <a:effectStyle>
           <a:effectLst>
-            <a:outerShdw blurRad="40000" dist="20000" dir="5400000" rotWithShape="0">
+            <a:outerShdw blurRad="57150" dist="19050" dir="5400000" algn="ctr" rotWithShape="0">
               <a:srgbClr val="000000">
-                <a:alpha val="38000"/>
+                <a:alpha val="63000"/>
               </a:srgbClr>
             </a:outerShdw>
           </a:effectLst>
-        </a:effectStyle>
-        <a:effectStyle>
-          <a:effectLst>
-            <a:outerShdw blurRad="40000" dist="23000" dir="5400000" rotWithShape="0">
-              <a:srgbClr val="000000">
-                <a:alpha val="35000"/>
-              </a:srgbClr>
-            </a:outerShdw>
-          </a:effectLst>
-        </a:effectStyle>
-        <a:effectStyle>
-          <a:effectLst>
-            <a:outerShdw blurRad="40000" dist="23000" dir="5400000" rotWithShape="0">
-              <a:srgbClr val="000000">
-                <a:alpha val="35000"/>
-              </a:srgbClr>
-            </a:outerShdw>
-          </a:effectLst>
-          <a:scene3d>
-            <a:camera prst="orthographicFront">
-              <a:rot lat="0" lon="0" rev="0"/>
-            </a:camera>
-            <a:lightRig rig="threePt" dir="t">
-              <a:rot lat="0" lon="0" rev="1200000"/>
-            </a:lightRig>
-          </a:scene3d>
-          <a:sp3d>
-            <a:bevelT w="63500" h="25400"/>
-          </a:sp3d>
         </a:effectStyle>
       </a:effectStyleLst>
       <a:bgFillStyleLst>
         <a:solidFill>
           <a:schemeClr val="phClr"/>
         </a:solidFill>
+        <a:solidFill>
+          <a:schemeClr val="phClr">
+            <a:tint val="95000"/>
+            <a:satMod val="170000"/>
+          </a:schemeClr>
+        </a:solidFill>
         <a:gradFill rotWithShape="1">
           <a:gsLst>
             <a:gs pos="0">
               <a:schemeClr val="phClr">
-                <a:tint val="40000"/>
-                <a:satMod val="350000"/>
+                <a:tint val="93000"/>
+                <a:satMod val="150000"/>
+                <a:shade val="98000"/>
+                <a:lumMod val="102000"/>
               </a:schemeClr>
             </a:gs>
-            <a:gs pos="40000">
+            <a:gs pos="50000">
               <a:schemeClr val="phClr">
-                <a:tint val="45000"/>
-                <a:shade val="99000"/>
-                <a:satMod val="350000"/>
+                <a:tint val="98000"/>
+                <a:satMod val="130000"/>
+                <a:shade val="90000"/>
+                <a:lumMod val="103000"/>
               </a:schemeClr>
             </a:gs>
             <a:gs pos="100000">
               <a:schemeClr val="phClr">
-                <a:shade val="20000"/>
-                <a:satMod val="255000"/>
+                <a:shade val="63000"/>
+                <a:satMod val="120000"/>
               </a:schemeClr>
             </a:gs>
           </a:gsLst>
-          <a:path path="circle">
-            <a:fillToRect l="50000" t="-80000" r="50000" b="180000"/>
-          </a:path>
-        </a:gradFill>
-        <a:gradFill rotWithShape="1">
-          <a:gsLst>
-            <a:gs pos="0">
-              <a:schemeClr val="phClr">
-                <a:tint val="80000"/>
-                <a:satMod val="300000"/>
-              </a:schemeClr>
-            </a:gs>
-            <a:gs pos="100000">
-              <a:schemeClr val="phClr">
-                <a:shade val="30000"/>
-                <a:satMod val="200000"/>
-              </a:schemeClr>
-            </a:gs>
-          </a:gsLst>
-          <a:path path="circle">
-            <a:fillToRect l="50000" t="50000" r="50000" b="50000"/>
-          </a:path>
+          <a:lin ang="5400000" scaled="0"/>
         </a:gradFill>
       </a:bgFillStyleLst>
     </a:fmtScheme>
   </a:themeElements>
   <a:objectDefaults>
-    <a:spDef>
-      <a:spPr/>
-      <a:bodyPr/>
-      <a:lstStyle/>
-      <a:style>
-        <a:lnRef idx="1">
-          <a:schemeClr val="accent1"/>
-        </a:lnRef>
-        <a:fillRef idx="3">
-          <a:schemeClr val="accent1"/>
-        </a:fillRef>
-        <a:effectRef idx="2">
-          <a:schemeClr val="accent1"/>
-        </a:effectRef>
-        <a:fontRef idx="minor">
-          <a:schemeClr val="lt1"/>
-        </a:fontRef>
-      </a:style>
-    </a:spDef>
     <a:lnDef>
       <a:spPr/>
       <a:bodyPr/>
@@ -15929,5 +16251,10 @@
     </a:lnDef>
   </a:objectDefaults>
   <a:extraClrSchemeLst/>
+  <a:extLst>
+    <a:ext uri="{05A4C25C-085E-4340-85A3-A5531E510DB2}">
+      <thm15:themeFamily xmlns:thm15="http://schemas.microsoft.com/office/thememl/2012/main" name="Office Theme" id="{2E142A2C-CD16-42D6-873A-C26D2A0506FA}" vid="{1BDDFF52-6CD6-40A5-AB3C-68EB2F1E4D0A}"/>
+    </a:ext>
+  </a:extLst>
 </a:theme>
 </file>